--- a/BYTE BRIGADE_PS01.pptx
+++ b/BYTE BRIGADE_PS01.pptx
@@ -3886,7 +3886,7 @@
                 <a:ea typeface="Poppins" pitchFamily="34" charset="-122"/>
                 <a:cs typeface="Poppins" pitchFamily="34" charset="-120"/>
               </a:rPr>
-              <a:t>Briefly describe the research foundation or scientific principles supporting your idea.</a:t>
+              <a:t>Every component is drawn from peer-reviewed restoration research, not invented for this hackathon.</a:t>
             </a:r>
             <a:endParaRPr lang="en-US" sz="1000" dirty="0"/>
           </a:p>
@@ -4136,7 +4136,7 @@
                 <a:ea typeface="Poppins" pitchFamily="34" charset="-122"/>
                 <a:cs typeface="Poppins" pitchFamily="34" charset="-120"/>
               </a:rPr>
-              <a:t>List key papers, articles, or data sources.</a:t>
+              <a:t>The three papers behind our architecture, our upsampler and our perceptual metric.</a:t>
             </a:r>
             <a:endParaRPr lang="en-US" sz="1000" dirty="0"/>
           </a:p>
@@ -5224,7 +5224,7 @@
                 <a:ea typeface="Poppins" pitchFamily="34" charset="-122"/>
                 <a:cs typeface="Poppins" pitchFamily="34" charset="-120"/>
               </a:rPr>
-              <a:t>A team can have up to 4 members including the team leader. Add rows if necessary.</a:t>
+              <a:t>Problem Statement PS01 (KLA) - AI-Based Restoration of Degraded Images for Semiconductor Inspection</a:t>
             </a:r>
             <a:endParaRPr lang="en-US" sz="1000" b="1" dirty="0"/>
           </a:p>
@@ -7610,37 +7610,7 @@
                 <a:ea typeface="Poppins" pitchFamily="34" charset="-122"/>
                 <a:cs typeface="Poppins" pitchFamily="34" charset="-120"/>
               </a:rPr>
-              <a:t>Idea Description - </a:t>
-            </a:r>
-            <a:r>
-              <a:rPr lang="en-US" sz="2400" b="1" dirty="0">
-                <a:solidFill>
-                  <a:schemeClr val="tx2"/>
-                </a:solidFill>
-                <a:latin typeface="Poppins" panose="00000500000000000000" pitchFamily="2" charset="0"/>
-                <a:cs typeface="Poppins" panose="00000500000000000000" pitchFamily="2" charset="0"/>
-              </a:rPr>
-              <a:t>Describe your Idea/Solution</a:t>
-            </a:r>
-            <a:r>
-              <a:rPr lang="en-US" sz="2400" b="1" u="sng" dirty="0">
-                <a:solidFill>
-                  <a:schemeClr val="tx2"/>
-                </a:solidFill>
-                <a:latin typeface="Poppins" panose="00000500000000000000" pitchFamily="2" charset="0"/>
-                <a:cs typeface="Poppins" panose="00000500000000000000" pitchFamily="2" charset="0"/>
-              </a:rPr>
-              <a:t>/</a:t>
-            </a:r>
-            <a:r>
-              <a:rPr lang="en-US" sz="2400" b="1" dirty="0">
-                <a:solidFill>
-                  <a:schemeClr val="tx2"/>
-                </a:solidFill>
-                <a:latin typeface="Poppins" panose="00000500000000000000" pitchFamily="2" charset="0"/>
-                <a:cs typeface="Poppins" panose="00000500000000000000" pitchFamily="2" charset="0"/>
-              </a:rPr>
-              <a:t>Prototype</a:t>
+              <a:t>Idea Description</a:t>
             </a:r>
             <a:endParaRPr lang="en-US" sz="2600" dirty="0">
               <a:latin typeface="Poppins" panose="00000500000000000000" pitchFamily="2" charset="0"/>
@@ -7901,7 +7871,7 @@
                 <a:ea typeface="Poppins" pitchFamily="34" charset="-122"/>
                 <a:cs typeface="Poppins" pitchFamily="34" charset="-120"/>
               </a:rPr>
-              <a:t>Provide a brief summary of your idea, including the key concept and approach. Provide a brief overview of your solution and how it addresses the problem statement.</a:t>
+              <a:t>One small network restores a noisy 128x128 image to a clean 256x256 one - denoising and 2x super-resolution in a single pass, trained only on the data provided.</a:t>
             </a:r>
             <a:endParaRPr lang="en-US" sz="1600" dirty="0"/>
           </a:p>
@@ -8055,7 +8025,7 @@
                 <a:ea typeface="Poppins" pitchFamily="34" charset="-122"/>
                 <a:cs typeface="Poppins" pitchFamily="34" charset="-120"/>
               </a:rPr>
-              <a:t>Predicts only a correction on a bicubic upscale: recovers structure, cannot invent it.</a:t>
+              <a:t>Predicts only a correction on a bicubic upscale, which strongly constrains hallucination.</a:t>
             </a:r>
             <a:endParaRPr lang="en-US" sz="1200" dirty="0"/>
           </a:p>
@@ -8171,7 +8141,7 @@
                 <a:ea typeface="Poppins" pitchFamily="34" charset="-122"/>
                 <a:cs typeface="Poppins" pitchFamily="34" charset="-120"/>
               </a:rPr>
-              <a:t>NAFNet-SR: 0.53 M parameters, 6.5 MB - runs on a laptop CPU.</a:t>
+              <a:t>NAFNet-SR: 0.53 M parameters, 2.3 MB checkpoint - runs on a laptop CPU.</a:t>
             </a:r>
             <a:endParaRPr lang="en-US" sz="1200" dirty="0"/>
           </a:p>
@@ -8209,7 +8179,7 @@
                 <a:ea typeface="Poppins" pitchFamily="34" charset="-122"/>
                 <a:cs typeface="Poppins" pitchFamily="34" charset="-120"/>
               </a:rPr>
-              <a:t>28.00 dB PSNR / 0.759 SSIM / 0.175 LPIPS - beats bicubic on every metric.</a:t>
+              <a:t>28.00 dB PSNR / 0.759 SSIM / 0.175 LPIPS - beats bicubic on all three.</a:t>
             </a:r>
             <a:endParaRPr lang="en-US" sz="1200" dirty="0"/>
           </a:p>
@@ -8562,37 +8532,7 @@
                 <a:ea typeface="Poppins" pitchFamily="34" charset="-122"/>
                 <a:cs typeface="Poppins" pitchFamily="34" charset="-120"/>
               </a:rPr>
-              <a:t>Proposed Solution -</a:t>
-            </a:r>
-            <a:r>
-              <a:rPr lang="en-US" sz="2400" b="1" dirty="0">
-                <a:solidFill>
-                  <a:schemeClr val="tx2"/>
-                </a:solidFill>
-                <a:latin typeface="Poppins" panose="00000500000000000000" pitchFamily="2" charset="0"/>
-                <a:cs typeface="Poppins" panose="00000500000000000000" pitchFamily="2" charset="0"/>
-              </a:rPr>
-              <a:t> Describe your Idea/Solution</a:t>
-            </a:r>
-            <a:r>
-              <a:rPr lang="en-US" sz="2400" b="1" u="sng" dirty="0">
-                <a:solidFill>
-                  <a:schemeClr val="tx2"/>
-                </a:solidFill>
-                <a:latin typeface="Poppins" panose="00000500000000000000" pitchFamily="2" charset="0"/>
-                <a:cs typeface="Poppins" panose="00000500000000000000" pitchFamily="2" charset="0"/>
-              </a:rPr>
-              <a:t>/</a:t>
-            </a:r>
-            <a:r>
-              <a:rPr lang="en-US" sz="2400" b="1" dirty="0">
-                <a:solidFill>
-                  <a:schemeClr val="tx2"/>
-                </a:solidFill>
-                <a:latin typeface="Poppins" panose="00000500000000000000" pitchFamily="2" charset="0"/>
-                <a:cs typeface="Poppins" panose="00000500000000000000" pitchFamily="2" charset="0"/>
-              </a:rPr>
-              <a:t>Prototype</a:t>
+              <a:t>Proposed Solution</a:t>
             </a:r>
             <a:endParaRPr lang="en-US" sz="2600" dirty="0"/>
           </a:p>
@@ -8850,7 +8790,7 @@
                 <a:ea typeface="Poppins" pitchFamily="34" charset="-122"/>
                 <a:cs typeface="Poppins" pitchFamily="34" charset="-120"/>
               </a:rPr>
-              <a:t>Describe your idea in detail. Include the methodology, technologies involved, and how it addresses the chosen problem statement.</a:t>
+              <a:t>NAFNet-SR: 24 simplified restoration blocks and a learned 2x upsampler, added to a bicubic upscale so the network predicts only a correction.</a:t>
             </a:r>
             <a:endParaRPr lang="en-US" sz="1800" dirty="0"/>
           </a:p>
@@ -9604,7 +9544,7 @@
                 <a:ea typeface="Poppins" pitchFamily="34" charset="-122"/>
                 <a:cs typeface="Poppins" pitchFamily="34" charset="-120"/>
               </a:rPr>
-              <a:t>Highlight what makes your idea unique or innovative compared to existing solutions.</a:t>
+              <a:t>We train directly on the judged metrics, and constrain the model to correct rather than generate - decisive when invented structure could be mistaken for a defect.</a:t>
             </a:r>
             <a:endParaRPr lang="en-US" sz="1800" dirty="0"/>
           </a:p>
@@ -9874,7 +9814,7 @@
                 <a:ea typeface="Poppins" pitchFamily="34" charset="-122"/>
                 <a:cs typeface="Poppins" pitchFamily="34" charset="-120"/>
               </a:rPr>
-              <a:t>SMALLER: 0.53 M parameters versus 10-26 M for Restormer or SwinIR, so throughput - an explicit scoring axis - is a strength, not a compromise.</a:t>
+              <a:t>SMALLER: 0.53 M parameters (2.3 MB) versus 10-26 M for Restormer or SwinIR, so throughput - an explicit scoring axis - is a strength.</a:t>
             </a:r>
             <a:endParaRPr lang="en-US" sz="1200" dirty="0"/>
           </a:p>
@@ -10526,33 +10466,7 @@
                 <a:ea typeface="Poppins" pitchFamily="34" charset="-122"/>
                 <a:cs typeface="Poppins" pitchFamily="34" charset="-120"/>
               </a:rPr>
-              <a:t>Explain how your solution will make an impact, such as improving </a:t>
-            </a:r>
-            <a:r>
-              <a:rPr lang="en-US" dirty="0">
-                <a:solidFill>
-                  <a:srgbClr val="AEFF82">
-                    <a:alpha val="80000"/>
-                  </a:srgbClr>
-                </a:solidFill>
-                <a:latin typeface="Poppins" pitchFamily="34" charset="0"/>
-                <a:ea typeface="Poppins" pitchFamily="34" charset="-122"/>
-                <a:cs typeface="Poppins" pitchFamily="34" charset="-120"/>
-              </a:rPr>
-              <a:t>performance</a:t>
-            </a:r>
-            <a:r>
-              <a:rPr lang="en-US" sz="1800" dirty="0">
-                <a:solidFill>
-                  <a:srgbClr val="AEFF82">
-                    <a:alpha val="80000"/>
-                  </a:srgbClr>
-                </a:solidFill>
-                <a:latin typeface="Poppins" pitchFamily="34" charset="0"/>
-                <a:ea typeface="Poppins" pitchFamily="34" charset="-122"/>
-                <a:cs typeface="Poppins" pitchFamily="34" charset="-120"/>
-              </a:rPr>
-              <a:t>, reducing costs, increasing efficiency, or solving other challenges.</a:t>
+              <a:t>Better on all three judged image-quality metrics, at 25 ms per image - recovering detail that noise would otherwise hide, with no new hardware.</a:t>
             </a:r>
             <a:endParaRPr lang="en-US" sz="1800" dirty="0"/>
           </a:p>
@@ -10894,7 +10808,7 @@
                 <a:ea typeface="Poppins" pitchFamily="34" charset="-122"/>
                 <a:cs typeface="Poppins" pitchFamily="34" charset="-120"/>
               </a:rPr>
-              <a:t>0.53 M parameters, 6.5 MB - runs on CPU</a:t>
+              <a:t>0.53 M parameters, 2.3 MB checkpoint - runs on CPU</a:t>
             </a:r>
             <a:endParaRPr lang="en-US" sz="1000" dirty="0"/>
           </a:p>
@@ -11513,7 +11427,7 @@
                 <a:ea typeface="Poppins" pitchFamily="34" charset="-122"/>
                 <a:cs typeface="Poppins" pitchFamily="34" charset="-120"/>
               </a:rPr>
-              <a:t>Describe the technologies, methodologies, or tools you plan to use to implement your idea.</a:t>
+              <a:t>PyTorch and NAFNet-SR, trained in about two hours on a free Colab T4, and deployable on either a GPU or a plain laptop CPU.</a:t>
             </a:r>
             <a:endParaRPr lang="en-US" sz="1800" dirty="0"/>
           </a:p>

--- a/BYTE BRIGADE_PS01.pptx
+++ b/BYTE BRIGADE_PS01.pptx
@@ -7093,8 +7093,8 @@
         </p:nvSpPr>
         <p:spPr>
           <a:xfrm>
-            <a:off x="961949" y="3768242"/>
-            <a:ext cx="10267798" cy="1417320"/>
+            <a:off x="961949" y="3584448"/>
+            <a:ext cx="10267798" cy="1645920"/>
           </a:xfrm>
           <a:prstGeom prst="roundRect">
             <a:avLst>
@@ -7129,7 +7129,7 @@
         </p:nvSpPr>
         <p:spPr>
           <a:xfrm>
-            <a:off x="1200607" y="4006901"/>
+            <a:off x="1200607" y="3703320"/>
             <a:ext cx="1690726" cy="191110"/>
           </a:xfrm>
           <a:prstGeom prst="rect">
@@ -7168,8 +7168,8 @@
         </p:nvSpPr>
         <p:spPr>
           <a:xfrm>
-            <a:off x="1200607" y="4352544"/>
-            <a:ext cx="8968435" cy="640080"/>
+            <a:off x="1200607" y="3968496"/>
+            <a:ext cx="8968435" cy="1170432"/>
           </a:xfrm>
           <a:prstGeom prst="rect">
             <a:avLst/>
@@ -7182,10 +7182,13 @@
           <a:lstStyle/>
           <a:p>
             <a:pPr marL="0" indent="0" algn="l">
+              <a:spcAft>
+                <a:spcPts val="300"/>
+              </a:spcAft>
               <a:buNone/>
             </a:pPr>
             <a:r>
-              <a:rPr lang="en-US" sz="1050" i="1" dirty="0">
+              <a:rPr lang="en-US" sz="1100" i="1" dirty="0">
                 <a:solidFill>
                   <a:srgbClr val="FFFFFF">
                     <a:alpha val="70000"/>
@@ -7201,10 +7204,13 @@
           </a:p>
           <a:p>
             <a:pPr marL="0" indent="0" algn="l">
+              <a:spcAft>
+                <a:spcPts val="300"/>
+              </a:spcAft>
               <a:buNone/>
             </a:pPr>
             <a:r>
-              <a:rPr lang="en-US" sz="1050" i="1" dirty="0">
+              <a:rPr lang="en-US" sz="1100" i="1" dirty="0">
                 <a:solidFill>
                   <a:srgbClr val="FFFFFF">
                     <a:alpha val="70000"/>
@@ -7220,10 +7226,13 @@
           </a:p>
           <a:p>
             <a:pPr marL="0" indent="0" algn="l">
+              <a:spcAft>
+                <a:spcPts val="300"/>
+              </a:spcAft>
               <a:buNone/>
             </a:pPr>
             <a:r>
-              <a:rPr lang="en-US" sz="1050" i="1" dirty="0">
+              <a:rPr lang="en-US" sz="1100" i="1" dirty="0">
                 <a:solidFill>
                   <a:srgbClr val="FFFFFF">
                     <a:alpha val="70000"/>
@@ -7239,10 +7248,13 @@
           </a:p>
           <a:p>
             <a:pPr marL="0" indent="0" algn="l">
+              <a:spcAft>
+                <a:spcPts val="300"/>
+              </a:spcAft>
               <a:buNone/>
             </a:pPr>
             <a:r>
-              <a:rPr lang="en-US" sz="1050" i="1" dirty="0">
+              <a:rPr lang="en-US" sz="1100" i="1" dirty="0">
                 <a:solidFill>
                   <a:srgbClr val="FFFFFF">
                     <a:alpha val="70000"/>
@@ -7384,8 +7396,8 @@
         </p:blipFill>
         <p:spPr>
           <a:xfrm>
-            <a:off x="4617720" y="5349240"/>
-            <a:ext cx="2926080" cy="1230147"/>
+            <a:off x="4480560" y="5349240"/>
+            <a:ext cx="2468880" cy="1037937"/>
           </a:xfrm>
           <a:prstGeom prst="rect">
             <a:avLst/>
@@ -7885,8 +7897,8 @@
         </p:nvSpPr>
         <p:spPr>
           <a:xfrm>
-            <a:off x="961949" y="4060850"/>
-            <a:ext cx="10267798" cy="1005840"/>
+            <a:off x="961949" y="3840480"/>
+            <a:ext cx="10267798" cy="1133856"/>
           </a:xfrm>
           <a:prstGeom prst="roundRect">
             <a:avLst>
@@ -7921,7 +7933,7 @@
         </p:nvSpPr>
         <p:spPr>
           <a:xfrm>
-            <a:off x="1162202" y="4261104"/>
+            <a:off x="1162202" y="3959352"/>
             <a:ext cx="1996135" cy="191110"/>
           </a:xfrm>
           <a:prstGeom prst="rect">
@@ -7960,8 +7972,8 @@
         </p:nvSpPr>
         <p:spPr>
           <a:xfrm>
-            <a:off x="1162202" y="4528109"/>
-            <a:ext cx="7677302" cy="502920"/>
+            <a:off x="1162202" y="4224528"/>
+            <a:ext cx="7677302" cy="658368"/>
           </a:xfrm>
           <a:prstGeom prst="rect">
             <a:avLst/>
@@ -7974,10 +7986,13 @@
           <a:lstStyle/>
           <a:p>
             <a:pPr marL="0" indent="0" algn="l">
+              <a:spcAft>
+                <a:spcPts val="500"/>
+              </a:spcAft>
               <a:buNone/>
             </a:pPr>
             <a:r>
-              <a:rPr lang="en-US" sz="1050" i="1" dirty="0">
+              <a:rPr lang="en-US" sz="1200" i="1" dirty="0">
                 <a:solidFill>
                   <a:srgbClr val="FFFFFF">
                     <a:alpha val="70000"/>
@@ -7993,10 +8008,13 @@
           </a:p>
           <a:p>
             <a:pPr marL="0" indent="0" algn="l">
+              <a:spcAft>
+                <a:spcPts val="500"/>
+              </a:spcAft>
               <a:buNone/>
             </a:pPr>
             <a:r>
-              <a:rPr lang="en-US" sz="1050" i="1" dirty="0">
+              <a:rPr lang="en-US" sz="1200" i="1" dirty="0">
                 <a:solidFill>
                   <a:srgbClr val="FFFFFF">
                     <a:alpha val="70000"/>
@@ -8012,10 +8030,13 @@
           </a:p>
           <a:p>
             <a:pPr marL="0" indent="0" algn="l">
+              <a:spcAft>
+                <a:spcPts val="500"/>
+              </a:spcAft>
               <a:buNone/>
             </a:pPr>
             <a:r>
-              <a:rPr lang="en-US" sz="1050" i="1" dirty="0">
+              <a:rPr lang="en-US" sz="1200" i="1" dirty="0">
                 <a:solidFill>
                   <a:srgbClr val="FFFFFF">
                     <a:alpha val="70000"/>
@@ -8039,8 +8060,8 @@
         </p:nvSpPr>
         <p:spPr>
           <a:xfrm>
-            <a:off x="961949" y="5108753"/>
-            <a:ext cx="10267798" cy="1188720"/>
+            <a:off x="961949" y="5047488"/>
+            <a:ext cx="10267798" cy="1307592"/>
           </a:xfrm>
           <a:prstGeom prst="roundRect">
             <a:avLst>
@@ -8075,7 +8096,7 @@
         </p:nvSpPr>
         <p:spPr>
           <a:xfrm>
-            <a:off x="1162202" y="5309006"/>
+            <a:off x="1162202" y="5166359"/>
             <a:ext cx="1548079" cy="191110"/>
           </a:xfrm>
           <a:prstGeom prst="rect">
@@ -8114,8 +8135,8 @@
         </p:nvSpPr>
         <p:spPr>
           <a:xfrm>
-            <a:off x="1162202" y="5575097"/>
-            <a:ext cx="8458200" cy="658368"/>
+            <a:off x="1162202" y="5431536"/>
+            <a:ext cx="8458200" cy="832103"/>
           </a:xfrm>
           <a:prstGeom prst="rect">
             <a:avLst/>
@@ -8128,10 +8149,13 @@
           <a:lstStyle/>
           <a:p>
             <a:pPr marL="0" indent="0" algn="l">
+              <a:spcAft>
+                <a:spcPts val="500"/>
+              </a:spcAft>
               <a:buNone/>
             </a:pPr>
             <a:r>
-              <a:rPr lang="en-US" sz="1050" i="1" dirty="0">
+              <a:rPr lang="en-US" sz="1200" i="1" dirty="0">
                 <a:solidFill>
                   <a:srgbClr val="FFFFFF">
                     <a:alpha val="70000"/>
@@ -8147,10 +8171,13 @@
           </a:p>
           <a:p>
             <a:pPr marL="0" indent="0" algn="l">
+              <a:spcAft>
+                <a:spcPts val="500"/>
+              </a:spcAft>
               <a:buNone/>
             </a:pPr>
             <a:r>
-              <a:rPr lang="en-US" sz="1050" i="1" dirty="0">
+              <a:rPr lang="en-US" sz="1200" i="1" dirty="0">
                 <a:solidFill>
                   <a:srgbClr val="FFFFFF">
                     <a:alpha val="70000"/>
@@ -8166,10 +8193,13 @@
           </a:p>
           <a:p>
             <a:pPr marL="0" indent="0" algn="l">
+              <a:spcAft>
+                <a:spcPts val="500"/>
+              </a:spcAft>
               <a:buNone/>
             </a:pPr>
             <a:r>
-              <a:rPr lang="en-US" sz="1050" i="1" dirty="0">
+              <a:rPr lang="en-US" sz="1200" i="1" dirty="0">
                 <a:solidFill>
                   <a:srgbClr val="FFFFFF">
                     <a:alpha val="70000"/>
@@ -8185,10 +8215,13 @@
           </a:p>
           <a:p>
             <a:pPr marL="0" indent="0" algn="l">
+              <a:spcAft>
+                <a:spcPts val="500"/>
+              </a:spcAft>
               <a:buNone/>
             </a:pPr>
             <a:r>
-              <a:rPr lang="en-US" sz="1050" i="1" dirty="0">
+              <a:rPr lang="en-US" sz="1200" i="1" dirty="0">
                 <a:solidFill>
                   <a:srgbClr val="FFFFFF">
                     <a:alpha val="70000"/>
@@ -8804,8 +8837,8 @@
         </p:nvSpPr>
         <p:spPr>
           <a:xfrm>
-            <a:off x="961949" y="4134002"/>
-            <a:ext cx="10267798" cy="2212848"/>
+            <a:off x="961949" y="3840480"/>
+            <a:ext cx="10267798" cy="2487168"/>
           </a:xfrm>
           <a:prstGeom prst="roundRect">
             <a:avLst>
@@ -8840,7 +8873,7 @@
         </p:nvSpPr>
         <p:spPr>
           <a:xfrm>
-            <a:off x="1200607" y="4372661"/>
+            <a:off x="1200607" y="3959352"/>
             <a:ext cx="1367028" cy="191110"/>
           </a:xfrm>
           <a:prstGeom prst="rect">
@@ -8879,8 +8912,8 @@
         </p:nvSpPr>
         <p:spPr>
           <a:xfrm>
-            <a:off x="1200607" y="4648810"/>
-            <a:ext cx="8996782" cy="365760"/>
+            <a:off x="1200607" y="4224528"/>
+            <a:ext cx="8996782" cy="2011680"/>
           </a:xfrm>
           <a:prstGeom prst="rect">
             <a:avLst/>
@@ -8893,10 +8926,13 @@
           <a:lstStyle/>
           <a:p>
             <a:pPr marL="0" indent="0" algn="l">
+              <a:spcAft>
+                <a:spcPts val="500"/>
+              </a:spcAft>
               <a:buNone/>
             </a:pPr>
             <a:r>
-              <a:rPr lang="en-US" sz="1000" i="1" dirty="0">
+              <a:rPr lang="en-US" sz="1150" i="1" dirty="0">
                 <a:solidFill>
                   <a:srgbClr val="FFFFFF">
                     <a:alpha val="70000"/>
@@ -8912,10 +8948,13 @@
           </a:p>
           <a:p>
             <a:pPr marL="0" indent="0" algn="l">
+              <a:spcAft>
+                <a:spcPts val="500"/>
+              </a:spcAft>
               <a:buNone/>
             </a:pPr>
             <a:r>
-              <a:rPr lang="en-US" sz="1000" i="1" dirty="0">
+              <a:rPr lang="en-US" sz="1150" i="1" dirty="0">
                 <a:solidFill>
                   <a:srgbClr val="FFFFFF">
                     <a:alpha val="70000"/>
@@ -9057,8 +9096,8 @@
         </p:blipFill>
         <p:spPr>
           <a:xfrm>
-            <a:off x="2258568" y="4983480"/>
-            <a:ext cx="7680960" cy="1627322"/>
+            <a:off x="2304288" y="4709160"/>
+            <a:ext cx="7589520" cy="1607949"/>
           </a:xfrm>
           <a:prstGeom prst="rect">
             <a:avLst/>
@@ -9558,8 +9597,8 @@
         </p:nvSpPr>
         <p:spPr>
           <a:xfrm>
-            <a:off x="961949" y="3845052"/>
-            <a:ext cx="5020056" cy="2331720"/>
+            <a:off x="961949" y="3703320"/>
+            <a:ext cx="5020056" cy="2633472"/>
           </a:xfrm>
           <a:prstGeom prst="roundRect">
             <a:avLst>
@@ -9594,7 +9633,7 @@
         </p:nvSpPr>
         <p:spPr>
           <a:xfrm>
-            <a:off x="1200607" y="4082796"/>
+            <a:off x="1200607" y="3822191"/>
             <a:ext cx="1271930" cy="191110"/>
           </a:xfrm>
           <a:prstGeom prst="rect">
@@ -9633,8 +9672,8 @@
         </p:nvSpPr>
         <p:spPr>
           <a:xfrm>
-            <a:off x="1200607" y="4349801"/>
-            <a:ext cx="4429354" cy="1737360"/>
+            <a:off x="1200607" y="4087368"/>
+            <a:ext cx="4429354" cy="2157984"/>
           </a:xfrm>
           <a:prstGeom prst="rect">
             <a:avLst/>
@@ -9647,10 +9686,13 @@
           <a:lstStyle/>
           <a:p>
             <a:pPr marL="0" indent="0" algn="l">
+              <a:spcAft>
+                <a:spcPts val="500"/>
+              </a:spcAft>
               <a:buNone/>
             </a:pPr>
             <a:r>
-              <a:rPr lang="en-US" sz="1050" i="1" dirty="0">
+              <a:rPr lang="en-US" sz="1150" i="1" dirty="0">
                 <a:solidFill>
                   <a:srgbClr val="FFFFFF">
                     <a:alpha val="70000"/>
@@ -9666,10 +9708,13 @@
           </a:p>
           <a:p>
             <a:pPr marL="0" indent="0" algn="l">
+              <a:spcAft>
+                <a:spcPts val="500"/>
+              </a:spcAft>
               <a:buNone/>
             </a:pPr>
             <a:r>
-              <a:rPr lang="en-US" sz="1050" i="1" dirty="0">
+              <a:rPr lang="en-US" sz="1150" i="1" dirty="0">
                 <a:solidFill>
                   <a:srgbClr val="FFFFFF">
                     <a:alpha val="70000"/>
@@ -9685,10 +9730,13 @@
           </a:p>
           <a:p>
             <a:pPr marL="0" indent="0" algn="l">
+              <a:spcAft>
+                <a:spcPts val="500"/>
+              </a:spcAft>
               <a:buNone/>
             </a:pPr>
             <a:r>
-              <a:rPr lang="en-US" sz="1050" i="1" dirty="0">
+              <a:rPr lang="en-US" sz="1150" i="1" dirty="0">
                 <a:solidFill>
                   <a:srgbClr val="FFFFFF">
                     <a:alpha val="70000"/>
@@ -9712,8 +9760,8 @@
         </p:nvSpPr>
         <p:spPr>
           <a:xfrm>
-            <a:off x="6210605" y="3845052"/>
-            <a:ext cx="5020056" cy="2331720"/>
+            <a:off x="6210605" y="3703320"/>
+            <a:ext cx="5020056" cy="2633472"/>
           </a:xfrm>
           <a:prstGeom prst="roundRect">
             <a:avLst>
@@ -9748,7 +9796,7 @@
         </p:nvSpPr>
         <p:spPr>
           <a:xfrm>
-            <a:off x="6448349" y="4082796"/>
+            <a:off x="6448349" y="3822191"/>
             <a:ext cx="1901038" cy="191110"/>
           </a:xfrm>
           <a:prstGeom prst="rect">
@@ -9787,8 +9835,8 @@
         </p:nvSpPr>
         <p:spPr>
           <a:xfrm>
-            <a:off x="6448349" y="4349801"/>
-            <a:ext cx="4239158" cy="1737360"/>
+            <a:off x="6448349" y="4087368"/>
+            <a:ext cx="4239158" cy="2157984"/>
           </a:xfrm>
           <a:prstGeom prst="rect">
             <a:avLst/>
@@ -9801,10 +9849,13 @@
           <a:lstStyle/>
           <a:p>
             <a:pPr marL="0" indent="0" algn="l">
+              <a:spcAft>
+                <a:spcPts val="500"/>
+              </a:spcAft>
               <a:buNone/>
             </a:pPr>
             <a:r>
-              <a:rPr lang="en-US" sz="1050" i="1" dirty="0">
+              <a:rPr lang="en-US" sz="1150" i="1" dirty="0">
                 <a:solidFill>
                   <a:srgbClr val="FFFFFF">
                     <a:alpha val="70000"/>
@@ -9820,10 +9871,13 @@
           </a:p>
           <a:p>
             <a:pPr marL="0" indent="0" algn="l">
+              <a:spcAft>
+                <a:spcPts val="500"/>
+              </a:spcAft>
               <a:buNone/>
             </a:pPr>
             <a:r>
-              <a:rPr lang="en-US" sz="1050" i="1" dirty="0">
+              <a:rPr lang="en-US" sz="1150" i="1" dirty="0">
                 <a:solidFill>
                   <a:srgbClr val="FFFFFF">
                     <a:alpha val="70000"/>
@@ -9839,10 +9893,13 @@
           </a:p>
           <a:p>
             <a:pPr marL="0" indent="0" algn="l">
+              <a:spcAft>
+                <a:spcPts val="500"/>
+              </a:spcAft>
               <a:buNone/>
             </a:pPr>
             <a:r>
-              <a:rPr lang="en-US" sz="1050" i="1" dirty="0">
+              <a:rPr lang="en-US" sz="1150" i="1" dirty="0">
                 <a:solidFill>
                   <a:srgbClr val="FFFFFF">
                     <a:alpha val="70000"/>
@@ -9858,10 +9915,13 @@
           </a:p>
           <a:p>
             <a:pPr marL="0" indent="0" algn="l">
+              <a:spcAft>
+                <a:spcPts val="500"/>
+              </a:spcAft>
               <a:buNone/>
             </a:pPr>
             <a:r>
-              <a:rPr lang="en-US" sz="1050" i="1" dirty="0">
+              <a:rPr lang="en-US" sz="1150" i="1" dirty="0">
                 <a:solidFill>
                   <a:srgbClr val="FFFFFF">
                     <a:alpha val="70000"/>
@@ -10480,8 +10540,8 @@
         </p:nvSpPr>
         <p:spPr>
           <a:xfrm>
-            <a:off x="961949" y="4210812"/>
-            <a:ext cx="5020056" cy="955547"/>
+            <a:off x="961949" y="3840480"/>
+            <a:ext cx="5020056" cy="1298448"/>
           </a:xfrm>
           <a:prstGeom prst="roundRect">
             <a:avLst>
@@ -10523,7 +10583,7 @@
         </p:blipFill>
         <p:spPr>
           <a:xfrm>
-            <a:off x="1200607" y="4233672"/>
+            <a:off x="1200607" y="3941063"/>
             <a:ext cx="152705" cy="152705"/>
           </a:xfrm>
           <a:prstGeom prst="rect">
@@ -10539,7 +10599,7 @@
         </p:nvSpPr>
         <p:spPr>
           <a:xfrm>
-            <a:off x="1466698" y="4224528"/>
+            <a:off x="1466698" y="3931920"/>
             <a:ext cx="1324051" cy="219456"/>
           </a:xfrm>
           <a:prstGeom prst="rect">
@@ -10578,8 +10638,8 @@
         </p:nvSpPr>
         <p:spPr>
           <a:xfrm>
-            <a:off x="1200607" y="4462272"/>
-            <a:ext cx="4148633" cy="566928"/>
+            <a:off x="1200607" y="4187952"/>
+            <a:ext cx="4148633" cy="777240"/>
           </a:xfrm>
           <a:prstGeom prst="rect">
             <a:avLst/>
@@ -10595,7 +10655,7 @@
               <a:buNone/>
             </a:pPr>
             <a:r>
-              <a:rPr lang="en-US" sz="1000" dirty="0">
+              <a:rPr lang="en-US" sz="1150" dirty="0">
                 <a:solidFill>
                   <a:srgbClr val="D1D5DB"/>
                 </a:solidFill>
@@ -10612,7 +10672,7 @@
               <a:buNone/>
             </a:pPr>
             <a:r>
-              <a:rPr lang="en-US" sz="1000" dirty="0">
+              <a:rPr lang="en-US" sz="1150" dirty="0">
                 <a:solidFill>
                   <a:srgbClr val="D1D5DB"/>
                 </a:solidFill>
@@ -10634,8 +10694,8 @@
         </p:nvSpPr>
         <p:spPr>
           <a:xfrm>
-            <a:off x="6210605" y="4210812"/>
-            <a:ext cx="5020056" cy="955547"/>
+            <a:off x="6210605" y="3840480"/>
+            <a:ext cx="5020056" cy="1298448"/>
           </a:xfrm>
           <a:prstGeom prst="roundRect">
             <a:avLst>
@@ -10677,7 +10737,7 @@
         </p:blipFill>
         <p:spPr>
           <a:xfrm>
-            <a:off x="6448349" y="4233672"/>
+            <a:off x="6448349" y="3941063"/>
             <a:ext cx="171907" cy="152705"/>
           </a:xfrm>
           <a:prstGeom prst="rect">
@@ -10693,7 +10753,7 @@
         </p:nvSpPr>
         <p:spPr>
           <a:xfrm>
-            <a:off x="6734556" y="4224528"/>
+            <a:off x="6734556" y="3931920"/>
             <a:ext cx="1924812" cy="219456"/>
           </a:xfrm>
           <a:prstGeom prst="rect">
@@ -10732,8 +10792,8 @@
         </p:nvSpPr>
         <p:spPr>
           <a:xfrm>
-            <a:off x="6448349" y="4462272"/>
-            <a:ext cx="3986784" cy="731520"/>
+            <a:off x="6448349" y="4187952"/>
+            <a:ext cx="3986784" cy="868680"/>
           </a:xfrm>
           <a:prstGeom prst="rect">
             <a:avLst/>
@@ -10749,7 +10809,7 @@
               <a:buNone/>
             </a:pPr>
             <a:r>
-              <a:rPr lang="en-US" sz="1000" dirty="0">
+              <a:rPr lang="en-US" sz="1150" dirty="0">
                 <a:solidFill>
                   <a:srgbClr val="D1D5DB"/>
                 </a:solidFill>
@@ -10766,7 +10826,7 @@
               <a:buNone/>
             </a:pPr>
             <a:r>
-              <a:rPr lang="en-US" sz="1000" dirty="0">
+              <a:rPr lang="en-US" sz="1150" dirty="0">
                 <a:solidFill>
                   <a:srgbClr val="D1D5DB"/>
                 </a:solidFill>
@@ -10783,7 +10843,7 @@
               <a:buNone/>
             </a:pPr>
             <a:r>
-              <a:rPr lang="en-US" sz="1000" dirty="0">
+              <a:rPr lang="en-US" sz="1150" dirty="0">
                 <a:solidFill>
                   <a:srgbClr val="D1D5DB"/>
                 </a:solidFill>
@@ -10800,7 +10860,7 @@
               <a:buNone/>
             </a:pPr>
             <a:r>
-              <a:rPr lang="en-US" sz="1000" dirty="0">
+              <a:rPr lang="en-US" sz="1150" dirty="0">
                 <a:solidFill>
                   <a:srgbClr val="D1D5DB"/>
                 </a:solidFill>
@@ -10940,8 +11000,8 @@
         </p:blipFill>
         <p:spPr>
           <a:xfrm>
-            <a:off x="2331720" y="5257800"/>
-            <a:ext cx="7498079" cy="1131066"/>
+            <a:off x="2304288" y="5230368"/>
+            <a:ext cx="7589520" cy="1144859"/>
           </a:xfrm>
           <a:prstGeom prst="rect">
             <a:avLst/>

--- a/BYTE BRIGADE_PS01.pptx
+++ b/BYTE BRIGADE_PS01.pptx
@@ -8002,7 +8002,7 @@
                 <a:ea typeface="Poppins" pitchFamily="34" charset="-122"/>
                 <a:cs typeface="Poppins" pitchFamily="34" charset="-120"/>
               </a:rPr>
-              <a:t>One small network denoises and 2x super-resolves in a single pass.</a:t>
+              <a:t>1. Supervised on the 3,200 provided pairs - no external datasets, no pretrained restoration weights.</a:t>
             </a:r>
             <a:endParaRPr lang="en-US" sz="1200" dirty="0"/>
           </a:p>
@@ -8024,7 +8024,7 @@
                 <a:ea typeface="Poppins" pitchFamily="34" charset="-122"/>
                 <a:cs typeface="Poppins" pitchFamily="34" charset="-120"/>
               </a:rPr>
-              <a:t>Supervised on the 3,200 provided pairs - no external data, no pretrained restoration weights.</a:t>
+              <a:t>2. One network performs denoising and 2x super-resolution in a single pass.</a:t>
             </a:r>
             <a:endParaRPr lang="en-US" sz="1200" dirty="0"/>
           </a:p>
@@ -8046,7 +8046,7 @@
                 <a:ea typeface="Poppins" pitchFamily="34" charset="-122"/>
                 <a:cs typeface="Poppins" pitchFamily="34" charset="-120"/>
               </a:rPr>
-              <a:t>Predicts only a correction on a bicubic upscale, which strongly constrains hallucination.</a:t>
+              <a:t>3. Residual learning - the model corrects rather than generates, which strongly constrains hallucination.</a:t>
             </a:r>
             <a:endParaRPr lang="en-US" sz="1200" dirty="0"/>
           </a:p>
@@ -8823,7 +8823,7 @@
                 <a:ea typeface="Poppins" pitchFamily="34" charset="-122"/>
                 <a:cs typeface="Poppins" pitchFamily="34" charset="-120"/>
               </a:rPr>
-              <a:t>NAFNet-SR: 24 simplified restoration blocks and a learned 2x upsampler, added to a bicubic upscale so the network predicts only a correction.</a:t>
+              <a:t>NAFNet-SR: 24 NAFNet blocks with 48 channels and a learned 2x PixelShuffle upsampler - 0.53 M parameters, 2.3 MB inference checkpoint.</a:t>
             </a:r>
             <a:endParaRPr lang="en-US" sz="1800" dirty="0"/>
           </a:p>
@@ -9850,12 +9850,12 @@
           <a:p>
             <a:pPr marL="0" indent="0" algn="l">
               <a:spcAft>
-                <a:spcPts val="500"/>
+                <a:spcPts val="400"/>
               </a:spcAft>
               <a:buNone/>
             </a:pPr>
             <a:r>
-              <a:rPr lang="en-US" sz="1150" i="1" dirty="0">
+              <a:rPr lang="en-US" sz="1100" i="1" dirty="0">
                 <a:solidFill>
                   <a:srgbClr val="FFFFFF">
                     <a:alpha val="70000"/>
@@ -9865,19 +9865,19 @@
                 <a:ea typeface="Poppins" pitchFamily="34" charset="-122"/>
                 <a:cs typeface="Poppins" pitchFamily="34" charset="-120"/>
               </a:rPr>
-              <a:t>SMALLER: 0.53 M parameters (2.3 MB) versus 10-26 M for Restormer or SwinIR, so throughput - an explicit scoring axis - is a strength.</a:t>
+              <a:t>SMALLER: 0.53 M parameters (2.3 MB) vs 10-26 M for Restormer or SwinIR - throughput is a strength, not a compromise.</a:t>
             </a:r>
             <a:endParaRPr lang="en-US" sz="1200" dirty="0"/>
           </a:p>
           <a:p>
             <a:pPr marL="0" indent="0" algn="l">
               <a:spcAft>
-                <a:spcPts val="500"/>
+                <a:spcPts val="400"/>
               </a:spcAft>
               <a:buNone/>
             </a:pPr>
             <a:r>
-              <a:rPr lang="en-US" sz="1150" i="1" dirty="0">
+              <a:rPr lang="en-US" sz="1100" i="1" dirty="0">
                 <a:solidFill>
                   <a:srgbClr val="FFFFFF">
                     <a:alpha val="70000"/>
@@ -9894,12 +9894,12 @@
           <a:p>
             <a:pPr marL="0" indent="0" algn="l">
               <a:spcAft>
-                <a:spcPts val="500"/>
+                <a:spcPts val="400"/>
               </a:spcAft>
               <a:buNone/>
             </a:pPr>
             <a:r>
-              <a:rPr lang="en-US" sz="1150" i="1" dirty="0">
+              <a:rPr lang="en-US" sz="1100" i="1" dirty="0">
                 <a:solidFill>
                   <a:srgbClr val="FFFFFF">
                     <a:alpha val="70000"/>
@@ -9916,12 +9916,12 @@
           <a:p>
             <a:pPr marL="0" indent="0" algn="l">
               <a:spcAft>
-                <a:spcPts val="500"/>
+                <a:spcPts val="400"/>
               </a:spcAft>
               <a:buNone/>
             </a:pPr>
             <a:r>
-              <a:rPr lang="en-US" sz="1150" i="1" dirty="0">
+              <a:rPr lang="en-US" sz="1100" i="1" dirty="0">
                 <a:solidFill>
                   <a:srgbClr val="FFFFFF">
                     <a:alpha val="70000"/>
@@ -9932,6 +9932,28 @@
                 <a:cs typeface="Poppins" pitchFamily="34" charset="-120"/>
               </a:rPr>
               <a:t>REPRODUCIBLE: seeded splits, one-command training and inference, weights and runtime report committed to the repository.</a:t>
+            </a:r>
+            <a:endParaRPr lang="en-US" sz="1200" dirty="0"/>
+          </a:p>
+          <a:p>
+            <a:pPr marL="0" indent="0" algn="l">
+              <a:spcAft>
+                <a:spcPts val="400"/>
+              </a:spcAft>
+              <a:buNone/>
+            </a:pPr>
+            <a:r>
+              <a:rPr lang="en-US" sz="1100" i="1" dirty="0">
+                <a:solidFill>
+                  <a:srgbClr val="FFFFFF">
+                    <a:alpha val="70000"/>
+                  </a:srgbClr>
+                </a:solidFill>
+                <a:latin typeface="Poppins" pitchFamily="34" charset="0"/>
+                <a:ea typeface="Poppins" pitchFamily="34" charset="-122"/>
+                <a:cs typeface="Poppins" pitchFamily="34" charset="-120"/>
+              </a:rPr>
+              <a:t>KNOWN LIMITATION: very fine texture gains least - downsampling destroys detail we will not invent.</a:t>
             </a:r>
             <a:endParaRPr lang="en-US" sz="1200" dirty="0"/>
           </a:p>

--- a/BYTE BRIGADE_PS01.pptx
+++ b/BYTE BRIGADE_PS01.pptx
@@ -5,18 +5,18 @@
     <p:sldMasterId id="2147483648" r:id="rId1"/>
   </p:sldMasterIdLst>
   <p:notesMasterIdLst>
-    <p:notesMasterId r:id="rId12"/>
+    <p:notesMasterId r:id="rId11"/>
   </p:notesMasterIdLst>
   <p:sldIdLst>
-    <p:sldId id="257" r:id="rId3"/>
-    <p:sldId id="258" r:id="rId4"/>
-    <p:sldId id="259" r:id="rId5"/>
-    <p:sldId id="260" r:id="rId6"/>
-    <p:sldId id="261" r:id="rId7"/>
-    <p:sldId id="262" r:id="rId8"/>
-    <p:sldId id="263" r:id="rId9"/>
-    <p:sldId id="268" r:id="rId10"/>
-    <p:sldId id="267" r:id="rId11"/>
+    <p:sldId id="257" r:id="rId2"/>
+    <p:sldId id="258" r:id="rId3"/>
+    <p:sldId id="259" r:id="rId4"/>
+    <p:sldId id="260" r:id="rId5"/>
+    <p:sldId id="261" r:id="rId6"/>
+    <p:sldId id="262" r:id="rId7"/>
+    <p:sldId id="263" r:id="rId8"/>
+    <p:sldId id="268" r:id="rId9"/>
+    <p:sldId id="267" r:id="rId10"/>
   </p:sldIdLst>
   <p:sldSz cx="12192000" cy="6858000"/>
   <p:notesSz cx="6858000" cy="12192000"/>
@@ -1378,90 +1378,6 @@
 </p:notes>
 </file>
 
-<file path=ppt/notesSlides/notesSlide10.xml><?xml version="1.0" encoding="utf-8"?>
-<p:notes xmlns:a="http://schemas.openxmlformats.org/drawingml/2006/main" xmlns:r="http://schemas.openxmlformats.org/officeDocument/2006/relationships" xmlns:p="http://schemas.openxmlformats.org/presentationml/2006/main">
-  <p:cSld>
-    <p:spTree>
-      <p:nvGrpSpPr>
-        <p:cNvPr id="1" name=""/>
-        <p:cNvGrpSpPr/>
-        <p:nvPr/>
-      </p:nvGrpSpPr>
-      <p:grpSpPr>
-        <a:xfrm>
-          <a:off x="0" y="0"/>
-          <a:ext cx="0" cy="0"/>
-          <a:chOff x="0" y="0"/>
-          <a:chExt cx="0" cy="0"/>
-        </a:xfrm>
-      </p:grpSpPr>
-      <p:sp>
-        <p:nvSpPr>
-          <p:cNvPr id="2" name="Slide Image Placeholder 1"/>
-          <p:cNvSpPr>
-            <a:spLocks noGrp="1" noRot="1" noChangeAspect="1"/>
-          </p:cNvSpPr>
-          <p:nvPr>
-            <p:ph type="sldImg"/>
-          </p:nvPr>
-        </p:nvSpPr>
-        <p:spPr/>
-      </p:sp>
-      <p:sp>
-        <p:nvSpPr>
-          <p:cNvPr id="3" name="Notes Placeholder 2"/>
-          <p:cNvSpPr>
-            <a:spLocks noGrp="1"/>
-          </p:cNvSpPr>
-          <p:nvPr>
-            <p:ph type="body" idx="1"/>
-          </p:nvPr>
-        </p:nvSpPr>
-        <p:spPr/>
-        <p:txBody>
-          <a:bodyPr/>
-          <a:lstStyle/>
-          <a:p>
-            <a:endParaRPr lang="en-US" dirty="0"/>
-          </a:p>
-        </p:txBody>
-      </p:sp>
-      <p:sp>
-        <p:nvSpPr>
-          <p:cNvPr id="4" name="Slide Number Placeholder 3"/>
-          <p:cNvSpPr>
-            <a:spLocks noGrp="1"/>
-          </p:cNvSpPr>
-          <p:nvPr>
-            <p:ph type="sldNum" sz="quarter" idx="10"/>
-          </p:nvPr>
-        </p:nvSpPr>
-        <p:spPr/>
-        <p:txBody>
-          <a:bodyPr/>
-          <a:lstStyle/>
-          <a:p>
-            <a:fld id="{F7021451-1387-4CA6-816F-3879F97B5CBC}" type="slidenum">
-              <a:rPr lang="en-US"/>
-              <a:t>10</a:t>
-            </a:fld>
-            <a:endParaRPr lang="en-US"/>
-          </a:p>
-        </p:txBody>
-      </p:sp>
-    </p:spTree>
-    <p:extLst>
-      <p:ext uri="{BB962C8B-B14F-4D97-AF65-F5344CB8AC3E}">
-        <p14:creationId xmlns:p14="http://schemas.microsoft.com/office/powerpoint/2010/main" val="1024086991"/>
-      </p:ext>
-    </p:extLst>
-  </p:cSld>
-  <p:clrMapOvr>
-    <a:masterClrMapping/>
-  </p:clrMapOvr>
-</p:notes>
-</file>
-
 <file path=ppt/notesSlides/notesSlide2.xml><?xml version="1.0" encoding="utf-8"?>
 <p:notes xmlns:a="http://schemas.openxmlformats.org/drawingml/2006/main" xmlns:r="http://schemas.openxmlformats.org/officeDocument/2006/relationships" xmlns:p="http://schemas.openxmlformats.org/presentationml/2006/main">
   <p:cSld>
@@ -2161,7 +2077,7 @@
           <p:cNvPr id="31" name="Shape 0">
             <a:extLst>
               <a:ext uri="{FF2B5EF4-FFF2-40B4-BE49-F238E27FC236}">
-                <a16:creationId xmlns:a16="http://schemas.microsoft.com/office/drawing/2014/main" id="{2BD26DD0-A441-CDA1-C7C4-500C0B482AE4}"/>
+                <a16:creationId xmlns:a16="http://schemas.microsoft.com/office/drawing/2014/main" xmlns="" id="{2BD26DD0-A441-CDA1-C7C4-500C0B482AE4}"/>
               </a:ext>
             </a:extLst>
           </p:cNvPr>
@@ -2194,7 +2110,7 @@
           <p:cNvPr id="33" name="Image 0" descr="preencoded.png">
             <a:extLst>
               <a:ext uri="{FF2B5EF4-FFF2-40B4-BE49-F238E27FC236}">
-                <a16:creationId xmlns:a16="http://schemas.microsoft.com/office/drawing/2014/main" id="{9C02DD19-DD7E-1634-0056-B0B673F6409D}"/>
+                <a16:creationId xmlns:a16="http://schemas.microsoft.com/office/drawing/2014/main" xmlns="" id="{9C02DD19-DD7E-1634-0056-B0B673F6409D}"/>
               </a:ext>
             </a:extLst>
           </p:cNvPr>
@@ -2225,7 +2141,7 @@
           <p:cNvPr id="35" name="Shape 1">
             <a:extLst>
               <a:ext uri="{FF2B5EF4-FFF2-40B4-BE49-F238E27FC236}">
-                <a16:creationId xmlns:a16="http://schemas.microsoft.com/office/drawing/2014/main" id="{2896CD82-D6A3-3A0B-5BEE-489BF15E90F1}"/>
+                <a16:creationId xmlns:a16="http://schemas.microsoft.com/office/drawing/2014/main" xmlns="" id="{2896CD82-D6A3-3A0B-5BEE-489BF15E90F1}"/>
               </a:ext>
             </a:extLst>
           </p:cNvPr>
@@ -2269,7 +2185,7 @@
           <p:cNvPr id="37" name="Image 2" descr="preencoded.png">
             <a:extLst>
               <a:ext uri="{FF2B5EF4-FFF2-40B4-BE49-F238E27FC236}">
-                <a16:creationId xmlns:a16="http://schemas.microsoft.com/office/drawing/2014/main" id="{FE4B1F73-561B-DEF0-4566-CD6294947263}"/>
+                <a16:creationId xmlns:a16="http://schemas.microsoft.com/office/drawing/2014/main" xmlns="" id="{FE4B1F73-561B-DEF0-4566-CD6294947263}"/>
               </a:ext>
             </a:extLst>
           </p:cNvPr>
@@ -2298,7 +2214,7 @@
           <p:cNvPr id="282" name="Picture 281">
             <a:extLst>
               <a:ext uri="{FF2B5EF4-FFF2-40B4-BE49-F238E27FC236}">
-                <a16:creationId xmlns:a16="http://schemas.microsoft.com/office/drawing/2014/main" id="{BD66A30C-A2DE-61B6-8B7B-4CF622680E59}"/>
+                <a16:creationId xmlns:a16="http://schemas.microsoft.com/office/drawing/2014/main" xmlns="" id="{BD66A30C-A2DE-61B6-8B7B-4CF622680E59}"/>
               </a:ext>
             </a:extLst>
           </p:cNvPr>
@@ -2615,1870 +2531,6 @@
 
 <file path=ppt/slides/slide1.xml><?xml version="1.0" encoding="utf-8"?>
 <p:sld xmlns:a="http://schemas.openxmlformats.org/drawingml/2006/main" xmlns:r="http://schemas.openxmlformats.org/officeDocument/2006/relationships" xmlns:p="http://schemas.openxmlformats.org/presentationml/2006/main">
-  <p:cSld name="Slide 1">
-    <p:spTree>
-      <p:nvGrpSpPr>
-        <p:cNvPr id="1" name=""/>
-        <p:cNvGrpSpPr/>
-        <p:nvPr/>
-      </p:nvGrpSpPr>
-      <p:grpSpPr>
-        <a:xfrm>
-          <a:off x="0" y="0"/>
-          <a:ext cx="0" cy="0"/>
-          <a:chOff x="0" y="0"/>
-          <a:chExt cx="0" cy="0"/>
-        </a:xfrm>
-      </p:grpSpPr>
-      <p:sp>
-        <p:nvSpPr>
-          <p:cNvPr id="2" name="Shape 0"/>
-          <p:cNvSpPr/>
-          <p:nvPr/>
-        </p:nvSpPr>
-        <p:spPr>
-          <a:xfrm>
-            <a:off x="0" y="0"/>
-            <a:ext cx="12191695" cy="6858000"/>
-          </a:xfrm>
-          <a:prstGeom prst="rect">
-            <a:avLst/>
-          </a:prstGeom>
-          <a:solidFill>
-            <a:srgbClr val="000036"/>
-          </a:solidFill>
-          <a:ln/>
-        </p:spPr>
-        <p:txBody>
-          <a:bodyPr/>
-          <a:lstStyle/>
-          <a:p>
-            <a:endParaRPr lang="en-IN"/>
-          </a:p>
-        </p:txBody>
-      </p:sp>
-      <p:pic>
-        <p:nvPicPr>
-          <p:cNvPr id="3" name="Image 0" descr="preencoded.png"/>
-          <p:cNvPicPr>
-            <a:picLocks noChangeAspect="1"/>
-          </p:cNvPicPr>
-          <p:nvPr/>
-        </p:nvPicPr>
-        <p:blipFill>
-          <a:blip r:embed="rId3">
-            <a:alphaModFix amt="20000"/>
-          </a:blip>
-          <a:srcRect l="12327" r="12327"/>
-          <a:stretch/>
-        </p:blipFill>
-        <p:spPr>
-          <a:xfrm>
-            <a:off x="0" y="0"/>
-            <a:ext cx="12191695" cy="7292340"/>
-          </a:xfrm>
-          <a:prstGeom prst="rect">
-            <a:avLst/>
-          </a:prstGeom>
-        </p:spPr>
-      </p:pic>
-      <p:sp>
-        <p:nvSpPr>
-          <p:cNvPr id="4" name="Shape 1"/>
-          <p:cNvSpPr/>
-          <p:nvPr/>
-        </p:nvSpPr>
-        <p:spPr>
-          <a:xfrm>
-            <a:off x="571500" y="381305"/>
-            <a:ext cx="11048695" cy="857707"/>
-          </a:xfrm>
-          <a:prstGeom prst="roundRect">
-            <a:avLst>
-              <a:gd name="adj" fmla="val 9476"/>
-            </a:avLst>
-          </a:prstGeom>
-          <a:solidFill>
-            <a:srgbClr val="FFFFFF">
-              <a:alpha val="95000"/>
-            </a:srgbClr>
-          </a:solidFill>
-          <a:ln/>
-          <a:effectLst>
-            <a:outerShdw blurRad="63500" dist="38100" dir="5400000" algn="bl" rotWithShape="0">
-              <a:srgbClr val="000000">
-                <a:alpha val="10000"/>
-              </a:srgbClr>
-            </a:outerShdw>
-          </a:effectLst>
-        </p:spPr>
-        <p:txBody>
-          <a:bodyPr/>
-          <a:lstStyle/>
-          <a:p>
-            <a:endParaRPr lang="en-IN"/>
-          </a:p>
-        </p:txBody>
-      </p:sp>
-      <p:sp>
-        <p:nvSpPr>
-          <p:cNvPr id="7" name="Shape 2"/>
-          <p:cNvSpPr/>
-          <p:nvPr/>
-        </p:nvSpPr>
-        <p:spPr>
-          <a:xfrm>
-            <a:off x="571500" y="2394815"/>
-            <a:ext cx="11048695" cy="4362602"/>
-          </a:xfrm>
-          <a:prstGeom prst="roundRect">
-            <a:avLst>
-              <a:gd name="adj" fmla="val 732"/>
-            </a:avLst>
-          </a:prstGeom>
-          <a:solidFill>
-            <a:srgbClr val="FFFFFF">
-              <a:alpha val="5000"/>
-            </a:srgbClr>
-          </a:solidFill>
-          <a:ln w="12700">
-            <a:solidFill>
-              <a:srgbClr val="AEFF82">
-                <a:alpha val="20000"/>
-              </a:srgbClr>
-            </a:solidFill>
-            <a:prstDash val="solid"/>
-          </a:ln>
-        </p:spPr>
-        <p:txBody>
-          <a:bodyPr/>
-          <a:lstStyle/>
-          <a:p>
-            <a:endParaRPr lang="en-IN"/>
-          </a:p>
-        </p:txBody>
-      </p:sp>
-      <p:sp>
-        <p:nvSpPr>
-          <p:cNvPr id="8" name="Shape 3"/>
-          <p:cNvSpPr/>
-          <p:nvPr/>
-        </p:nvSpPr>
-        <p:spPr>
-          <a:xfrm>
-            <a:off x="961949" y="3439058"/>
-            <a:ext cx="10267798" cy="9144"/>
-          </a:xfrm>
-          <a:prstGeom prst="rect">
-            <a:avLst/>
-          </a:prstGeom>
-          <a:solidFill>
-            <a:srgbClr val="4B5563"/>
-          </a:solidFill>
-          <a:ln/>
-        </p:spPr>
-        <p:txBody>
-          <a:bodyPr/>
-          <a:lstStyle/>
-          <a:p>
-            <a:endParaRPr lang="en-IN"/>
-          </a:p>
-        </p:txBody>
-      </p:sp>
-      <p:sp>
-        <p:nvSpPr>
-          <p:cNvPr id="9" name="Shape 4"/>
-          <p:cNvSpPr/>
-          <p:nvPr/>
-        </p:nvSpPr>
-        <p:spPr>
-          <a:xfrm>
-            <a:off x="961949" y="5721401"/>
-            <a:ext cx="10267798" cy="875995"/>
-          </a:xfrm>
-          <a:prstGeom prst="rect">
-            <a:avLst/>
-          </a:prstGeom>
-          <a:solidFill>
-            <a:srgbClr val="273383">
-              <a:alpha val="40000"/>
-            </a:srgbClr>
-          </a:solidFill>
-          <a:ln/>
-        </p:spPr>
-        <p:txBody>
-          <a:bodyPr/>
-          <a:lstStyle/>
-          <a:p>
-            <a:endParaRPr lang="en-IN"/>
-          </a:p>
-        </p:txBody>
-      </p:sp>
-      <p:sp>
-        <p:nvSpPr>
-          <p:cNvPr id="10" name="Shape 5"/>
-          <p:cNvSpPr/>
-          <p:nvPr/>
-        </p:nvSpPr>
-        <p:spPr>
-          <a:xfrm>
-            <a:off x="961949" y="5721401"/>
-            <a:ext cx="38405" cy="875995"/>
-          </a:xfrm>
-          <a:prstGeom prst="rect">
-            <a:avLst/>
-          </a:prstGeom>
-          <a:solidFill>
-            <a:srgbClr val="AEFF82"/>
-          </a:solidFill>
-          <a:ln/>
-        </p:spPr>
-        <p:txBody>
-          <a:bodyPr/>
-          <a:lstStyle/>
-          <a:p>
-            <a:endParaRPr lang="en-IN"/>
-          </a:p>
-        </p:txBody>
-      </p:sp>
-      <p:pic>
-        <p:nvPicPr>
-          <p:cNvPr id="11" name="Image 3" descr="preencoded.png"/>
-          <p:cNvPicPr>
-            <a:picLocks noChangeAspect="1"/>
-          </p:cNvPicPr>
-          <p:nvPr/>
-        </p:nvPicPr>
-        <p:blipFill>
-          <a:blip r:embed="rId4"/>
-          <a:srcRect l="-2838" r="-2838"/>
-          <a:stretch/>
-        </p:blipFill>
-        <p:spPr>
-          <a:xfrm>
-            <a:off x="3902659" y="7321601"/>
-            <a:ext cx="123444" cy="133502"/>
-          </a:xfrm>
-          <a:prstGeom prst="rect">
-            <a:avLst/>
-          </a:prstGeom>
-        </p:spPr>
-      </p:pic>
-      <p:sp>
-        <p:nvSpPr>
-          <p:cNvPr id="12" name="Text 6"/>
-          <p:cNvSpPr txBox="1"/>
-          <p:nvPr/>
-        </p:nvSpPr>
-        <p:spPr>
-          <a:xfrm>
-            <a:off x="571500" y="1429207"/>
-            <a:ext cx="6229807" cy="638251"/>
-          </a:xfrm>
-          <a:prstGeom prst="rect">
-            <a:avLst/>
-          </a:prstGeom>
-          <a:noFill/>
-          <a:ln/>
-        </p:spPr>
-        <p:txBody>
-          <a:bodyPr wrap="square" lIns="0" tIns="0" rIns="0" bIns="0" rtlCol="0" anchor="ctr"/>
-          <a:lstStyle/>
-          <a:p>
-            <a:pPr marL="0" indent="0" algn="l">
-              <a:buNone/>
-            </a:pPr>
-            <a:r>
-              <a:rPr lang="en-US" sz="3600" b="1" dirty="0">
-                <a:solidFill>
-                  <a:srgbClr val="FFFFFF"/>
-                </a:solidFill>
-                <a:latin typeface="Poppins" pitchFamily="34" charset="0"/>
-                <a:ea typeface="Poppins" pitchFamily="34" charset="-122"/>
-                <a:cs typeface="Poppins" pitchFamily="34" charset="-120"/>
-              </a:rPr>
-              <a:t>Hackathon 2026</a:t>
-            </a:r>
-            <a:endParaRPr lang="en-US" sz="3600" dirty="0"/>
-          </a:p>
-        </p:txBody>
-      </p:sp>
-      <p:sp>
-        <p:nvSpPr>
-          <p:cNvPr id="13" name="Text 7"/>
-          <p:cNvSpPr txBox="1"/>
-          <p:nvPr/>
-        </p:nvSpPr>
-        <p:spPr>
-          <a:xfrm>
-            <a:off x="571500" y="2018995"/>
-            <a:ext cx="4091026" cy="409651"/>
-          </a:xfrm>
-          <a:prstGeom prst="rect">
-            <a:avLst/>
-          </a:prstGeom>
-          <a:noFill/>
-          <a:ln/>
-        </p:spPr>
-        <p:txBody>
-          <a:bodyPr wrap="square" lIns="0" tIns="0" rIns="0" bIns="0" rtlCol="0" anchor="ctr"/>
-          <a:lstStyle/>
-          <a:p>
-            <a:pPr marL="0" indent="0" algn="l">
-              <a:buNone/>
-            </a:pPr>
-            <a:r>
-              <a:rPr lang="en-US" sz="2200" b="1" dirty="0">
-                <a:solidFill>
-                  <a:srgbClr val="AEFF82"/>
-                </a:solidFill>
-                <a:latin typeface="Poppins" pitchFamily="34" charset="0"/>
-                <a:ea typeface="Poppins" pitchFamily="34" charset="-122"/>
-                <a:cs typeface="Poppins" pitchFamily="34" charset="-120"/>
-              </a:rPr>
-              <a:t>Idea Submission Template</a:t>
-            </a:r>
-            <a:endParaRPr lang="en-US" sz="2200" dirty="0"/>
-          </a:p>
-        </p:txBody>
-      </p:sp>
-      <p:pic>
-        <p:nvPicPr>
-          <p:cNvPr id="14" name="Image 4" descr="preencoded.png"/>
-          <p:cNvPicPr>
-            <a:picLocks noChangeAspect="1"/>
-          </p:cNvPicPr>
-          <p:nvPr/>
-        </p:nvPicPr>
-        <p:blipFill>
-          <a:blip r:embed="rId5"/>
-          <a:srcRect/>
-          <a:stretch/>
-        </p:blipFill>
-        <p:spPr>
-          <a:xfrm>
-            <a:off x="961949" y="3047695"/>
-            <a:ext cx="228600" cy="228600"/>
-          </a:xfrm>
-          <a:prstGeom prst="rect">
-            <a:avLst/>
-          </a:prstGeom>
-        </p:spPr>
-      </p:pic>
-      <p:sp>
-        <p:nvSpPr>
-          <p:cNvPr id="15" name="Text 8"/>
-          <p:cNvSpPr txBox="1"/>
-          <p:nvPr/>
-        </p:nvSpPr>
-        <p:spPr>
-          <a:xfrm>
-            <a:off x="1304849" y="3010205"/>
-            <a:ext cx="6336922" cy="201167"/>
-          </a:xfrm>
-          <a:prstGeom prst="rect">
-            <a:avLst/>
-          </a:prstGeom>
-          <a:noFill/>
-          <a:ln/>
-        </p:spPr>
-        <p:txBody>
-          <a:bodyPr wrap="square" lIns="0" tIns="0" rIns="0" bIns="0" rtlCol="0" anchor="ctr"/>
-          <a:lstStyle/>
-          <a:p>
-            <a:pPr marL="0" indent="0" algn="l">
-              <a:buNone/>
-            </a:pPr>
-            <a:r>
-              <a:rPr lang="en-US" sz="1800" b="1" dirty="0">
-                <a:solidFill>
-                  <a:srgbClr val="FFFFFF"/>
-                </a:solidFill>
-                <a:latin typeface="Poppins" pitchFamily="34" charset="0"/>
-                <a:ea typeface="Poppins" pitchFamily="34" charset="-122"/>
-                <a:cs typeface="Poppins" pitchFamily="34" charset="-120"/>
-              </a:rPr>
-              <a:t>Instructions </a:t>
-            </a:r>
-            <a:r>
-              <a:rPr lang="en-US" sz="1200" i="1" dirty="0">
-                <a:solidFill>
-                  <a:srgbClr val="FFFFFF"/>
-                </a:solidFill>
-                <a:latin typeface="Poppins" pitchFamily="34" charset="0"/>
-                <a:ea typeface="Poppins" pitchFamily="34" charset="-122"/>
-                <a:cs typeface="Poppins" pitchFamily="34" charset="-120"/>
-              </a:rPr>
-              <a:t>(Remove this slide while submitting)</a:t>
-            </a:r>
-            <a:endParaRPr lang="en-US" sz="1800" i="1" dirty="0"/>
-          </a:p>
-        </p:txBody>
-      </p:sp>
-      <p:sp>
-        <p:nvSpPr>
-          <p:cNvPr id="16" name="Text 9"/>
-          <p:cNvSpPr txBox="1"/>
-          <p:nvPr/>
-        </p:nvSpPr>
-        <p:spPr>
-          <a:xfrm>
-            <a:off x="1190549" y="5911596"/>
-            <a:ext cx="1996135" cy="191110"/>
-          </a:xfrm>
-          <a:prstGeom prst="rect">
-            <a:avLst/>
-          </a:prstGeom>
-          <a:noFill/>
-          <a:ln/>
-        </p:spPr>
-        <p:txBody>
-          <a:bodyPr wrap="square" lIns="0" tIns="0" rIns="0" bIns="0" rtlCol="0" anchor="ctr"/>
-          <a:lstStyle/>
-          <a:p>
-            <a:pPr marL="0" indent="0" algn="l">
-              <a:buNone/>
-            </a:pPr>
-            <a:r>
-              <a:rPr lang="en-US" sz="1000" b="1" dirty="0">
-                <a:solidFill>
-                  <a:srgbClr val="D1D5DB"/>
-                </a:solidFill>
-                <a:latin typeface="Poppins" pitchFamily="34" charset="0"/>
-                <a:ea typeface="Poppins" pitchFamily="34" charset="-122"/>
-                <a:cs typeface="Poppins" pitchFamily="34" charset="-120"/>
-              </a:rPr>
-              <a:t>FILE NAMING CONVENTION</a:t>
-            </a:r>
-            <a:endParaRPr lang="en-US" sz="1000" dirty="0"/>
-          </a:p>
-        </p:txBody>
-      </p:sp>
-      <p:sp>
-        <p:nvSpPr>
-          <p:cNvPr id="17" name="Text 10"/>
-          <p:cNvSpPr txBox="1"/>
-          <p:nvPr/>
-        </p:nvSpPr>
-        <p:spPr>
-          <a:xfrm>
-            <a:off x="1190549" y="6159398"/>
-            <a:ext cx="3581705" cy="219456"/>
-          </a:xfrm>
-          <a:prstGeom prst="rect">
-            <a:avLst/>
-          </a:prstGeom>
-          <a:noFill/>
-          <a:ln/>
-        </p:spPr>
-        <p:txBody>
-          <a:bodyPr wrap="square" lIns="0" tIns="0" rIns="0" bIns="0" rtlCol="0" anchor="ctr"/>
-          <a:lstStyle/>
-          <a:p>
-            <a:pPr marL="0" indent="0" algn="l">
-              <a:buNone/>
-            </a:pPr>
-            <a:r>
-              <a:rPr lang="en-US" sz="1500" b="1" dirty="0">
-                <a:solidFill>
-                  <a:srgbClr val="AEFF82"/>
-                </a:solidFill>
-                <a:latin typeface="ui-monospace" pitchFamily="34" charset="0"/>
-                <a:ea typeface="ui-monospace" pitchFamily="34" charset="-122"/>
-                <a:cs typeface="ui-monospace" pitchFamily="34" charset="-120"/>
-              </a:rPr>
-              <a:t>Team Name_PSNo (E.g. i4C_PS01)</a:t>
-            </a:r>
-            <a:endParaRPr lang="en-US" sz="1500" dirty="0"/>
-          </a:p>
-        </p:txBody>
-      </p:sp>
-      <p:sp>
-        <p:nvSpPr>
-          <p:cNvPr id="18" name="Shape 11"/>
-          <p:cNvSpPr/>
-          <p:nvPr/>
-        </p:nvSpPr>
-        <p:spPr>
-          <a:xfrm>
-            <a:off x="3674059" y="7216445"/>
-            <a:ext cx="4848149" cy="342900"/>
-          </a:xfrm>
-          <a:prstGeom prst="roundRect">
-            <a:avLst>
-              <a:gd name="adj" fmla="val 266667"/>
-            </a:avLst>
-          </a:prstGeom>
-          <a:solidFill>
-            <a:srgbClr val="FFFFFF"/>
-          </a:solidFill>
-          <a:ln/>
-          <a:effectLst>
-            <a:outerShdw blurRad="12700" dist="12700" dir="16200000" algn="bl" rotWithShape="0">
-              <a:srgbClr val="000000">
-                <a:alpha val="75000"/>
-              </a:srgbClr>
-            </a:outerShdw>
-          </a:effectLst>
-        </p:spPr>
-        <p:txBody>
-          <a:bodyPr/>
-          <a:lstStyle/>
-          <a:p>
-            <a:endParaRPr lang="en-IN"/>
-          </a:p>
-        </p:txBody>
-      </p:sp>
-      <p:sp>
-        <p:nvSpPr>
-          <p:cNvPr id="19" name="Text 12"/>
-          <p:cNvSpPr txBox="1"/>
-          <p:nvPr/>
-        </p:nvSpPr>
-        <p:spPr>
-          <a:xfrm>
-            <a:off x="4102913" y="7292340"/>
-            <a:ext cx="4291279" cy="191110"/>
-          </a:xfrm>
-          <a:prstGeom prst="rect">
-            <a:avLst/>
-          </a:prstGeom>
-          <a:noFill/>
-          <a:ln/>
-        </p:spPr>
-        <p:txBody>
-          <a:bodyPr wrap="square" lIns="0" tIns="0" rIns="0" bIns="0" rtlCol="0" anchor="ctr"/>
-          <a:lstStyle/>
-          <a:p>
-            <a:pPr marL="0" indent="0" algn="ctr">
-              <a:buNone/>
-            </a:pPr>
-            <a:r>
-              <a:rPr lang="en-US" sz="1000" b="1" dirty="0">
-                <a:solidFill>
-                  <a:srgbClr val="DC2626"/>
-                </a:solidFill>
-                <a:latin typeface="Poppins" pitchFamily="34" charset="0"/>
-                <a:ea typeface="Poppins" pitchFamily="34" charset="-122"/>
-                <a:cs typeface="Poppins" pitchFamily="34" charset="-120"/>
-              </a:rPr>
-              <a:t>REMOVE THIS SLIDE FOR INSTRUCTIONS IN FINAL SUBMISSION</a:t>
-            </a:r>
-            <a:endParaRPr lang="en-US" sz="1000" dirty="0"/>
-          </a:p>
-        </p:txBody>
-      </p:sp>
-      <p:sp>
-        <p:nvSpPr>
-          <p:cNvPr id="20" name="Text 13"/>
-          <p:cNvSpPr txBox="1"/>
-          <p:nvPr/>
-        </p:nvSpPr>
-        <p:spPr>
-          <a:xfrm>
-            <a:off x="961948" y="4286354"/>
-            <a:ext cx="10267798" cy="1344521"/>
-          </a:xfrm>
-          <a:prstGeom prst="rect">
-            <a:avLst/>
-          </a:prstGeom>
-          <a:noFill/>
-          <a:ln/>
-        </p:spPr>
-        <p:txBody>
-          <a:bodyPr wrap="square" lIns="0" tIns="0" rIns="0" bIns="0" rtlCol="0" anchor="ctr"/>
-          <a:lstStyle/>
-          <a:p>
-            <a:pPr marL="285750" indent="-285750" algn="l">
-              <a:lnSpc>
-                <a:spcPct val="150000"/>
-              </a:lnSpc>
-              <a:buFont typeface="Arial" panose="020B0604020202020204" pitchFamily="34" charset="0"/>
-              <a:buChar char="•"/>
-            </a:pPr>
-            <a:r>
-              <a:rPr lang="en-US" sz="1400" dirty="0">
-                <a:solidFill>
-                  <a:srgbClr val="E0E0E0"/>
-                </a:solidFill>
-                <a:latin typeface="Poppins" pitchFamily="34" charset="0"/>
-                <a:ea typeface="Poppins" pitchFamily="34" charset="-122"/>
-                <a:cs typeface="Poppins" pitchFamily="34" charset="-120"/>
-              </a:rPr>
-              <a:t>Prepare the solution document as per this template, feel free to modify layouts while keeping core content .</a:t>
-            </a:r>
-          </a:p>
-          <a:p>
-            <a:pPr marL="285750" indent="-285750" algn="l">
-              <a:lnSpc>
-                <a:spcPct val="150000"/>
-              </a:lnSpc>
-              <a:buFont typeface="Arial" panose="020B0604020202020204" pitchFamily="34" charset="0"/>
-              <a:buChar char="•"/>
-            </a:pPr>
-            <a:r>
-              <a:rPr lang="en-US" sz="1400" dirty="0">
-                <a:solidFill>
-                  <a:srgbClr val="E0E0E0"/>
-                </a:solidFill>
-                <a:latin typeface="Poppins" pitchFamily="34" charset="0"/>
-                <a:ea typeface="Poppins" pitchFamily="34" charset="-122"/>
-                <a:cs typeface="Poppins" pitchFamily="34" charset="-120"/>
-              </a:rPr>
-              <a:t>Kindly keep the maximum slides limit up to six (6-7). ( Including the title slide) </a:t>
-            </a:r>
-          </a:p>
-          <a:p>
-            <a:pPr marL="285750" indent="-285750" algn="l">
-              <a:lnSpc>
-                <a:spcPct val="150000"/>
-              </a:lnSpc>
-              <a:buFont typeface="Arial" panose="020B0604020202020204" pitchFamily="34" charset="0"/>
-              <a:buChar char="•"/>
-            </a:pPr>
-            <a:r>
-              <a:rPr lang="en-US" sz="1400" dirty="0">
-                <a:solidFill>
-                  <a:srgbClr val="E0E0E0"/>
-                </a:solidFill>
-                <a:latin typeface="Poppins" pitchFamily="34" charset="0"/>
-                <a:ea typeface="Poppins" pitchFamily="34" charset="-122"/>
-                <a:cs typeface="Poppins" pitchFamily="34" charset="-120"/>
-              </a:rPr>
-              <a:t>Try to avoid paragraphs and post your idea in points /diagrams / Infographics /pictures .</a:t>
-            </a:r>
-          </a:p>
-          <a:p>
-            <a:pPr marL="285750" indent="-285750" algn="l">
-              <a:lnSpc>
-                <a:spcPct val="150000"/>
-              </a:lnSpc>
-              <a:buFont typeface="Arial" panose="020B0604020202020204" pitchFamily="34" charset="0"/>
-              <a:buChar char="•"/>
-            </a:pPr>
-            <a:r>
-              <a:rPr lang="en-US" sz="1400" dirty="0">
-                <a:solidFill>
-                  <a:srgbClr val="E0E0E0"/>
-                </a:solidFill>
-                <a:latin typeface="Poppins" pitchFamily="34" charset="0"/>
-                <a:ea typeface="Poppins" pitchFamily="34" charset="-122"/>
-                <a:cs typeface="Poppins" pitchFamily="34" charset="-120"/>
-              </a:rPr>
-              <a:t>You can only use provided template for making the PPT without changing the idea details pointers (mentioned in previous slides).</a:t>
-            </a:r>
-          </a:p>
-          <a:p>
-            <a:pPr marL="285750" indent="-285750" algn="l">
-              <a:lnSpc>
-                <a:spcPct val="150000"/>
-              </a:lnSpc>
-              <a:buFont typeface="Arial" panose="020B0604020202020204" pitchFamily="34" charset="0"/>
-              <a:buChar char="•"/>
-            </a:pPr>
-            <a:r>
-              <a:rPr lang="en-US" sz="1400" dirty="0">
-                <a:solidFill>
-                  <a:srgbClr val="E0E0E0"/>
-                </a:solidFill>
-                <a:latin typeface="Poppins" pitchFamily="34" charset="0"/>
-                <a:ea typeface="Poppins" pitchFamily="34" charset="-122"/>
-                <a:cs typeface="Poppins" pitchFamily="34" charset="-120"/>
-              </a:rPr>
-              <a:t>You need to save the file in PDF and upload the same on portal. No PPT, Word Doc or any other format will be supported.</a:t>
-            </a:r>
-          </a:p>
-          <a:p>
-            <a:pPr marL="285750" indent="-285750" algn="l">
-              <a:lnSpc>
-                <a:spcPct val="150000"/>
-              </a:lnSpc>
-              <a:buFont typeface="Arial" panose="020B0604020202020204" pitchFamily="34" charset="0"/>
-              <a:buChar char="•"/>
-            </a:pPr>
-            <a:endParaRPr lang="en-US" sz="1400" dirty="0">
-              <a:solidFill>
-                <a:srgbClr val="E0E0E0"/>
-              </a:solidFill>
-              <a:latin typeface="Poppins" pitchFamily="34" charset="0"/>
-              <a:ea typeface="Poppins" pitchFamily="34" charset="-122"/>
-              <a:cs typeface="Poppins" pitchFamily="34" charset="-120"/>
-            </a:endParaRPr>
-          </a:p>
-          <a:p>
-            <a:pPr marL="285750" indent="-285750" algn="l">
-              <a:lnSpc>
-                <a:spcPct val="150000"/>
-              </a:lnSpc>
-              <a:buFont typeface="Arial" panose="020B0604020202020204" pitchFamily="34" charset="0"/>
-              <a:buChar char="•"/>
-            </a:pPr>
-            <a:endParaRPr lang="en-US" sz="1400" dirty="0">
-              <a:solidFill>
-                <a:srgbClr val="E0E0E0"/>
-              </a:solidFill>
-              <a:latin typeface="Poppins" pitchFamily="34" charset="0"/>
-              <a:ea typeface="Poppins" pitchFamily="34" charset="-122"/>
-              <a:cs typeface="Poppins" pitchFamily="34" charset="-120"/>
-            </a:endParaRPr>
-          </a:p>
-          <a:p>
-            <a:pPr marL="285750" indent="-285750" algn="l">
-              <a:lnSpc>
-                <a:spcPct val="150000"/>
-              </a:lnSpc>
-              <a:buFont typeface="Arial" panose="020B0604020202020204" pitchFamily="34" charset="0"/>
-              <a:buChar char="•"/>
-            </a:pPr>
-            <a:endParaRPr lang="en-US" sz="1300" dirty="0"/>
-          </a:p>
-        </p:txBody>
-      </p:sp>
-      <p:pic>
-        <p:nvPicPr>
-          <p:cNvPr id="5" name="Picture 4">
-            <a:extLst>
-              <a:ext uri="{FF2B5EF4-FFF2-40B4-BE49-F238E27FC236}">
-                <a16:creationId xmlns:a16="http://schemas.microsoft.com/office/drawing/2014/main" id="{8BB4234F-3583-BFF9-C279-17614D0CF451}"/>
-              </a:ext>
-            </a:extLst>
-          </p:cNvPr>
-          <p:cNvPicPr>
-            <a:picLocks noChangeAspect="1"/>
-          </p:cNvPicPr>
-          <p:nvPr/>
-        </p:nvPicPr>
-        <p:blipFill>
-          <a:blip r:embed="rId6">
-            <a:extLst>
-              <a:ext uri="{28A0092B-C50C-407E-A947-70E740481C1C}">
-                <a14:useLocalDpi xmlns:a14="http://schemas.microsoft.com/office/drawing/2010/main" val="0"/>
-              </a:ext>
-            </a:extLst>
-          </a:blip>
-          <a:stretch>
-            <a:fillRect/>
-          </a:stretch>
-        </p:blipFill>
-        <p:spPr>
-          <a:xfrm>
-            <a:off x="1514101" y="511607"/>
-            <a:ext cx="9163491" cy="586435"/>
-          </a:xfrm>
-          <a:prstGeom prst="rect">
-            <a:avLst/>
-          </a:prstGeom>
-        </p:spPr>
-      </p:pic>
-    </p:spTree>
-  </p:cSld>
-  <p:clrMapOvr>
-    <a:masterClrMapping/>
-  </p:clrMapOvr>
-</p:sld>
-</file>
-
-<file path=ppt/slides/slide10.xml><?xml version="1.0" encoding="utf-8"?>
-<p:sld xmlns:a="http://schemas.openxmlformats.org/drawingml/2006/main" xmlns:r="http://schemas.openxmlformats.org/officeDocument/2006/relationships" xmlns:p="http://schemas.openxmlformats.org/presentationml/2006/main">
-  <p:cSld>
-    <p:spTree>
-      <p:nvGrpSpPr>
-        <p:cNvPr id="1" name=""/>
-        <p:cNvGrpSpPr/>
-        <p:nvPr/>
-      </p:nvGrpSpPr>
-      <p:grpSpPr>
-        <a:xfrm>
-          <a:off x="0" y="0"/>
-          <a:ext cx="0" cy="0"/>
-          <a:chOff x="0" y="0"/>
-          <a:chExt cx="0" cy="0"/>
-        </a:xfrm>
-      </p:grpSpPr>
-      <p:sp>
-        <p:nvSpPr>
-          <p:cNvPr id="2" name="Shape 0"/>
-          <p:cNvSpPr/>
-          <p:nvPr/>
-        </p:nvSpPr>
-        <p:spPr>
-          <a:xfrm>
-            <a:off x="0" y="0"/>
-            <a:ext cx="12191695" cy="6858000"/>
-          </a:xfrm>
-          <a:prstGeom prst="rect">
-            <a:avLst/>
-          </a:prstGeom>
-          <a:solidFill>
-            <a:srgbClr val="000036"/>
-          </a:solidFill>
-          <a:ln/>
-        </p:spPr>
-        <p:txBody>
-          <a:bodyPr/>
-          <a:lstStyle/>
-          <a:p>
-            <a:endParaRPr lang="en-IN"/>
-          </a:p>
-        </p:txBody>
-      </p:sp>
-      <p:pic>
-        <p:nvPicPr>
-          <p:cNvPr id="3" name="Image 0" descr="preencoded.png"/>
-          <p:cNvPicPr>
-            <a:picLocks noChangeAspect="1"/>
-          </p:cNvPicPr>
-          <p:nvPr/>
-        </p:nvPicPr>
-        <p:blipFill>
-          <a:blip r:embed="rId3">
-            <a:alphaModFix amt="10000"/>
-          </a:blip>
-          <a:srcRect l="12327" r="12327"/>
-          <a:stretch/>
-        </p:blipFill>
-        <p:spPr>
-          <a:xfrm>
-            <a:off x="0" y="0"/>
-            <a:ext cx="12191695" cy="6858000"/>
-          </a:xfrm>
-          <a:prstGeom prst="rect">
-            <a:avLst/>
-          </a:prstGeom>
-        </p:spPr>
-      </p:pic>
-      <p:sp>
-        <p:nvSpPr>
-          <p:cNvPr id="4" name="Shape 1"/>
-          <p:cNvSpPr/>
-          <p:nvPr/>
-        </p:nvSpPr>
-        <p:spPr>
-          <a:xfrm>
-            <a:off x="571500" y="286207"/>
-            <a:ext cx="11048695" cy="666598"/>
-          </a:xfrm>
-          <a:prstGeom prst="roundRect">
-            <a:avLst>
-              <a:gd name="adj" fmla="val 15677"/>
-            </a:avLst>
-          </a:prstGeom>
-          <a:solidFill>
-            <a:srgbClr val="FFFFFF">
-              <a:alpha val="95000"/>
-            </a:srgbClr>
-          </a:solidFill>
-          <a:ln/>
-          <a:effectLst>
-            <a:outerShdw blurRad="63500" dist="38100" dir="5400000" algn="bl" rotWithShape="0">
-              <a:srgbClr val="000000">
-                <a:alpha val="10000"/>
-              </a:srgbClr>
-            </a:outerShdw>
-          </a:effectLst>
-        </p:spPr>
-        <p:txBody>
-          <a:bodyPr/>
-          <a:lstStyle/>
-          <a:p>
-            <a:endParaRPr lang="en-IN"/>
-          </a:p>
-        </p:txBody>
-      </p:sp>
-      <p:pic>
-        <p:nvPicPr>
-          <p:cNvPr id="5" name="Image 1" descr="preencoded.png"/>
-          <p:cNvPicPr>
-            <a:picLocks noChangeAspect="1"/>
-          </p:cNvPicPr>
-          <p:nvPr/>
-        </p:nvPicPr>
-        <p:blipFill>
-          <a:blip r:embed="rId4"/>
-          <a:srcRect t="10" b="10"/>
-          <a:stretch/>
-        </p:blipFill>
-        <p:spPr>
-          <a:xfrm>
-            <a:off x="857707" y="381305"/>
-            <a:ext cx="1266444" cy="476402"/>
-          </a:xfrm>
-          <a:prstGeom prst="rect">
-            <a:avLst/>
-          </a:prstGeom>
-        </p:spPr>
-      </p:pic>
-      <p:pic>
-        <p:nvPicPr>
-          <p:cNvPr id="6" name="Image 2" descr="preencoded.png"/>
-          <p:cNvPicPr>
-            <a:picLocks noChangeAspect="1"/>
-          </p:cNvPicPr>
-          <p:nvPr/>
-        </p:nvPicPr>
-        <p:blipFill>
-          <a:blip r:embed="rId5"/>
-          <a:srcRect/>
-          <a:stretch/>
-        </p:blipFill>
-        <p:spPr>
-          <a:xfrm>
-            <a:off x="10858500" y="381305"/>
-            <a:ext cx="476402" cy="476402"/>
-          </a:xfrm>
-          <a:prstGeom prst="rect">
-            <a:avLst/>
-          </a:prstGeom>
-        </p:spPr>
-      </p:pic>
-      <p:sp>
-        <p:nvSpPr>
-          <p:cNvPr id="7" name="Shape 2"/>
-          <p:cNvSpPr/>
-          <p:nvPr/>
-        </p:nvSpPr>
-        <p:spPr>
-          <a:xfrm>
-            <a:off x="571500" y="1190549"/>
-            <a:ext cx="75895" cy="409651"/>
-          </a:xfrm>
-          <a:prstGeom prst="rect">
-            <a:avLst/>
-          </a:prstGeom>
-          <a:solidFill>
-            <a:srgbClr val="88E555"/>
-          </a:solidFill>
-          <a:ln/>
-        </p:spPr>
-        <p:txBody>
-          <a:bodyPr/>
-          <a:lstStyle/>
-          <a:p>
-            <a:endParaRPr lang="en-IN"/>
-          </a:p>
-        </p:txBody>
-      </p:sp>
-      <p:sp>
-        <p:nvSpPr>
-          <p:cNvPr id="8" name="Text 3"/>
-          <p:cNvSpPr txBox="1"/>
-          <p:nvPr/>
-        </p:nvSpPr>
-        <p:spPr>
-          <a:xfrm>
-            <a:off x="838505" y="1152144"/>
-            <a:ext cx="4624121" cy="467258"/>
-          </a:xfrm>
-          <a:prstGeom prst="rect">
-            <a:avLst/>
-          </a:prstGeom>
-          <a:noFill/>
-          <a:ln/>
-        </p:spPr>
-        <p:txBody>
-          <a:bodyPr wrap="square" lIns="0" tIns="0" rIns="0" bIns="0" rtlCol="0" anchor="ctr"/>
-          <a:lstStyle/>
-          <a:p>
-            <a:pPr marL="0" indent="0" algn="l">
-              <a:buNone/>
-            </a:pPr>
-            <a:r>
-              <a:rPr lang="en-US" sz="2600" b="1" dirty="0">
-                <a:solidFill>
-                  <a:srgbClr val="FFFFFF"/>
-                </a:solidFill>
-                <a:latin typeface="Poppins" pitchFamily="34" charset="0"/>
-                <a:ea typeface="Poppins" pitchFamily="34" charset="-122"/>
-                <a:cs typeface="Poppins" pitchFamily="34" charset="-120"/>
-              </a:rPr>
-              <a:t>Research and References</a:t>
-            </a:r>
-            <a:endParaRPr lang="en-US" sz="2600" dirty="0"/>
-          </a:p>
-        </p:txBody>
-      </p:sp>
-      <p:sp>
-        <p:nvSpPr>
-          <p:cNvPr id="9" name="Shape 4"/>
-          <p:cNvSpPr/>
-          <p:nvPr/>
-        </p:nvSpPr>
-        <p:spPr>
-          <a:xfrm>
-            <a:off x="571500" y="1830629"/>
-            <a:ext cx="11048695" cy="4743907"/>
-          </a:xfrm>
-          <a:prstGeom prst="roundRect">
-            <a:avLst>
-              <a:gd name="adj" fmla="val 619"/>
-            </a:avLst>
-          </a:prstGeom>
-          <a:solidFill>
-            <a:srgbClr val="FFFFFF">
-              <a:alpha val="5000"/>
-            </a:srgbClr>
-          </a:solidFill>
-          <a:ln w="12700">
-            <a:solidFill>
-              <a:srgbClr val="88E555">
-                <a:alpha val="30000"/>
-              </a:srgbClr>
-            </a:solidFill>
-            <a:prstDash val="solid"/>
-          </a:ln>
-        </p:spPr>
-        <p:txBody>
-          <a:bodyPr/>
-          <a:lstStyle/>
-          <a:p>
-            <a:endParaRPr lang="en-IN"/>
-          </a:p>
-        </p:txBody>
-      </p:sp>
-      <p:sp>
-        <p:nvSpPr>
-          <p:cNvPr id="10" name="Shape 5"/>
-          <p:cNvSpPr/>
-          <p:nvPr/>
-        </p:nvSpPr>
-        <p:spPr>
-          <a:xfrm>
-            <a:off x="571500" y="1830629"/>
-            <a:ext cx="190195" cy="190195"/>
-          </a:xfrm>
-          <a:prstGeom prst="roundRect">
-            <a:avLst>
-              <a:gd name="adj" fmla="val 192308"/>
-            </a:avLst>
-          </a:prstGeom>
-          <a:noFill/>
-          <a:ln w="38100">
-            <a:solidFill>
-              <a:srgbClr val="88E555"/>
-            </a:solidFill>
-            <a:prstDash val="solid"/>
-          </a:ln>
-        </p:spPr>
-        <p:txBody>
-          <a:bodyPr/>
-          <a:lstStyle/>
-          <a:p>
-            <a:endParaRPr lang="en-IN"/>
-          </a:p>
-        </p:txBody>
-      </p:sp>
-      <p:sp>
-        <p:nvSpPr>
-          <p:cNvPr id="11" name="Shape 6"/>
-          <p:cNvSpPr/>
-          <p:nvPr/>
-        </p:nvSpPr>
-        <p:spPr>
-          <a:xfrm>
-            <a:off x="11430000" y="1830629"/>
-            <a:ext cx="190195" cy="190195"/>
-          </a:xfrm>
-          <a:prstGeom prst="rect">
-            <a:avLst/>
-          </a:prstGeom>
-          <a:noFill/>
-          <a:ln w="38100">
-            <a:solidFill>
-              <a:srgbClr val="88E555"/>
-            </a:solidFill>
-            <a:prstDash val="solid"/>
-          </a:ln>
-        </p:spPr>
-        <p:txBody>
-          <a:bodyPr/>
-          <a:lstStyle/>
-          <a:p>
-            <a:endParaRPr lang="en-IN"/>
-          </a:p>
-        </p:txBody>
-      </p:sp>
-      <p:sp>
-        <p:nvSpPr>
-          <p:cNvPr id="12" name="Shape 7"/>
-          <p:cNvSpPr/>
-          <p:nvPr/>
-        </p:nvSpPr>
-        <p:spPr>
-          <a:xfrm>
-            <a:off x="571500" y="6381598"/>
-            <a:ext cx="190195" cy="190195"/>
-          </a:xfrm>
-          <a:prstGeom prst="rect">
-            <a:avLst/>
-          </a:prstGeom>
-          <a:noFill/>
-          <a:ln w="38100">
-            <a:solidFill>
-              <a:srgbClr val="88E555"/>
-            </a:solidFill>
-            <a:prstDash val="solid"/>
-          </a:ln>
-        </p:spPr>
-        <p:txBody>
-          <a:bodyPr/>
-          <a:lstStyle/>
-          <a:p>
-            <a:endParaRPr lang="en-IN"/>
-          </a:p>
-        </p:txBody>
-      </p:sp>
-      <p:sp>
-        <p:nvSpPr>
-          <p:cNvPr id="13" name="Shape 8"/>
-          <p:cNvSpPr/>
-          <p:nvPr/>
-        </p:nvSpPr>
-        <p:spPr>
-          <a:xfrm>
-            <a:off x="11430000" y="6381598"/>
-            <a:ext cx="190195" cy="190195"/>
-          </a:xfrm>
-          <a:prstGeom prst="rect">
-            <a:avLst/>
-          </a:prstGeom>
-          <a:noFill/>
-          <a:ln w="38100">
-            <a:solidFill>
-              <a:srgbClr val="88E555"/>
-            </a:solidFill>
-            <a:prstDash val="solid"/>
-          </a:ln>
-        </p:spPr>
-        <p:txBody>
-          <a:bodyPr/>
-          <a:lstStyle/>
-          <a:p>
-            <a:endParaRPr lang="en-IN"/>
-          </a:p>
-        </p:txBody>
-      </p:sp>
-      <p:sp>
-        <p:nvSpPr>
-          <p:cNvPr id="14" name="Shape 9"/>
-          <p:cNvSpPr/>
-          <p:nvPr/>
-        </p:nvSpPr>
-        <p:spPr>
-          <a:xfrm>
-            <a:off x="961949" y="2173529"/>
-            <a:ext cx="476402" cy="476402"/>
-          </a:xfrm>
-          <a:prstGeom prst="ellipse">
-            <a:avLst/>
-          </a:prstGeom>
-          <a:solidFill>
-            <a:srgbClr val="273383">
-              <a:alpha val="50000"/>
-            </a:srgbClr>
-          </a:solidFill>
-          <a:ln w="25400">
-            <a:solidFill>
-              <a:srgbClr val="AEFF82"/>
-            </a:solidFill>
-            <a:prstDash val="solid"/>
-          </a:ln>
-        </p:spPr>
-        <p:txBody>
-          <a:bodyPr/>
-          <a:lstStyle/>
-          <a:p>
-            <a:endParaRPr lang="en-IN"/>
-          </a:p>
-        </p:txBody>
-      </p:sp>
-      <p:pic>
-        <p:nvPicPr>
-          <p:cNvPr id="15" name="Image 3" descr="preencoded.png"/>
-          <p:cNvPicPr>
-            <a:picLocks noChangeAspect="1"/>
-          </p:cNvPicPr>
-          <p:nvPr/>
-        </p:nvPicPr>
-        <p:blipFill>
-          <a:blip r:embed="rId6"/>
-          <a:srcRect/>
-          <a:stretch/>
-        </p:blipFill>
-        <p:spPr>
-          <a:xfrm>
-            <a:off x="1086307" y="2297887"/>
-            <a:ext cx="228600" cy="228600"/>
-          </a:xfrm>
-          <a:prstGeom prst="rect">
-            <a:avLst/>
-          </a:prstGeom>
-        </p:spPr>
-      </p:pic>
-      <p:sp>
-        <p:nvSpPr>
-          <p:cNvPr id="16" name="Text 10"/>
-          <p:cNvSpPr txBox="1"/>
-          <p:nvPr/>
-        </p:nvSpPr>
-        <p:spPr>
-          <a:xfrm>
-            <a:off x="1628546" y="2173529"/>
-            <a:ext cx="3810305" cy="267005"/>
-          </a:xfrm>
-          <a:prstGeom prst="rect">
-            <a:avLst/>
-          </a:prstGeom>
-          <a:noFill/>
-          <a:ln/>
-        </p:spPr>
-        <p:txBody>
-          <a:bodyPr wrap="square" lIns="0" tIns="0" rIns="0" bIns="0" rtlCol="0" anchor="ctr"/>
-          <a:lstStyle/>
-          <a:p>
-            <a:pPr marL="0" indent="0" algn="l">
-              <a:buNone/>
-            </a:pPr>
-            <a:r>
-              <a:rPr lang="en-US" sz="1500" b="1" dirty="0">
-                <a:solidFill>
-                  <a:srgbClr val="88E555"/>
-                </a:solidFill>
-                <a:latin typeface="Poppins" pitchFamily="34" charset="0"/>
-                <a:ea typeface="Poppins" pitchFamily="34" charset="-122"/>
-                <a:cs typeface="Poppins" pitchFamily="34" charset="-120"/>
-              </a:rPr>
-              <a:t>Research Background &amp; Methodology</a:t>
-            </a:r>
-            <a:endParaRPr lang="en-US" sz="1500" dirty="0"/>
-          </a:p>
-        </p:txBody>
-      </p:sp>
-      <p:sp>
-        <p:nvSpPr>
-          <p:cNvPr id="17" name="Text 11"/>
-          <p:cNvSpPr txBox="1"/>
-          <p:nvPr/>
-        </p:nvSpPr>
-        <p:spPr>
-          <a:xfrm>
-            <a:off x="1628546" y="2516429"/>
-            <a:ext cx="5701284" cy="191110"/>
-          </a:xfrm>
-          <a:prstGeom prst="rect">
-            <a:avLst/>
-          </a:prstGeom>
-          <a:noFill/>
-          <a:ln/>
-        </p:spPr>
-        <p:txBody>
-          <a:bodyPr wrap="square" lIns="0" tIns="0" rIns="0" bIns="0" rtlCol="0" anchor="ctr"/>
-          <a:lstStyle/>
-          <a:p>
-            <a:pPr marL="0" indent="0" algn="l">
-              <a:buNone/>
-            </a:pPr>
-            <a:r>
-              <a:rPr lang="en-US" sz="1000" dirty="0">
-                <a:solidFill>
-                  <a:srgbClr val="D1D5DB"/>
-                </a:solidFill>
-                <a:latin typeface="Poppins" pitchFamily="34" charset="0"/>
-                <a:ea typeface="Poppins" pitchFamily="34" charset="-122"/>
-                <a:cs typeface="Poppins" pitchFamily="34" charset="-120"/>
-              </a:rPr>
-              <a:t>Every component is drawn from peer-reviewed restoration research, not invented for this hackathon.</a:t>
-            </a:r>
-            <a:endParaRPr lang="en-US" sz="1000" dirty="0"/>
-          </a:p>
-        </p:txBody>
-      </p:sp>
-      <p:sp>
-        <p:nvSpPr>
-          <p:cNvPr id="18" name="Shape 12"/>
-          <p:cNvSpPr/>
-          <p:nvPr/>
-        </p:nvSpPr>
-        <p:spPr>
-          <a:xfrm>
-            <a:off x="1628546" y="2783434"/>
-            <a:ext cx="9601200" cy="1188720"/>
-          </a:xfrm>
-          <a:prstGeom prst="roundRect">
-            <a:avLst>
-              <a:gd name="adj" fmla="val 6121"/>
-            </a:avLst>
-          </a:prstGeom>
-          <a:solidFill>
-            <a:srgbClr val="1E3A8A">
-              <a:alpha val="40000"/>
-            </a:srgbClr>
-          </a:solidFill>
-          <a:ln w="12700">
-            <a:solidFill>
-              <a:srgbClr val="1D4ED8"/>
-            </a:solidFill>
-            <a:prstDash val="solid"/>
-          </a:ln>
-        </p:spPr>
-        <p:txBody>
-          <a:bodyPr/>
-          <a:lstStyle/>
-          <a:p>
-            <a:endParaRPr lang="en-IN"/>
-          </a:p>
-        </p:txBody>
-      </p:sp>
-      <p:sp>
-        <p:nvSpPr>
-          <p:cNvPr id="19" name="Text 13"/>
-          <p:cNvSpPr txBox="1"/>
-          <p:nvPr/>
-        </p:nvSpPr>
-        <p:spPr>
-          <a:xfrm>
-            <a:off x="1790395" y="2945282"/>
-            <a:ext cx="5544007" cy="868680"/>
-          </a:xfrm>
-          <a:prstGeom prst="rect">
-            <a:avLst/>
-          </a:prstGeom>
-          <a:noFill/>
-          <a:ln/>
-        </p:spPr>
-        <p:txBody>
-          <a:bodyPr wrap="square" lIns="0" tIns="0" rIns="0" bIns="0" rtlCol="0" anchor="t"/>
-          <a:lstStyle/>
-          <a:p>
-            <a:pPr marL="0" indent="0" algn="l">
-              <a:buNone/>
-            </a:pPr>
-            <a:r>
-              <a:rPr lang="en-US" sz="1000" i="1" dirty="0">
-                <a:solidFill>
-                  <a:srgbClr val="FFFFFF">
-                    <a:alpha val="70000"/>
-                  </a:srgbClr>
-                </a:solidFill>
-                <a:latin typeface="Poppins" pitchFamily="34" charset="0"/>
-                <a:ea typeface="Poppins" pitchFamily="34" charset="-122"/>
-                <a:cs typeface="Poppins" pitchFamily="34" charset="-120"/>
-              </a:rPr>
-              <a:t>Built on published, peer-reviewed research rather than an unproven design: NAFNet (ECCV 2022) matches transformer restorers at a fraction of the cost.</a:t>
-            </a:r>
-            <a:endParaRPr lang="en-US" sz="1200" dirty="0"/>
-          </a:p>
-          <a:p>
-            <a:pPr marL="0" indent="0" algn="l">
-              <a:buNone/>
-            </a:pPr>
-            <a:r>
-              <a:rPr lang="en-US" sz="1000" i="1" dirty="0">
-                <a:solidFill>
-                  <a:srgbClr val="FFFFFF">
-                    <a:alpha val="70000"/>
-                  </a:srgbClr>
-                </a:solidFill>
-                <a:latin typeface="Poppins" pitchFamily="34" charset="0"/>
-                <a:ea typeface="Poppins" pitchFamily="34" charset="-122"/>
-                <a:cs typeface="Poppins" pitchFamily="34" charset="-120"/>
-              </a:rPr>
-              <a:t>Loss follows restoration literature - Charbonnier for pixel fidelity, SSIM for structure, LPIPS for perceptual quality.</a:t>
-            </a:r>
-            <a:endParaRPr lang="en-US" sz="1200" dirty="0"/>
-          </a:p>
-          <a:p>
-            <a:pPr marL="0" indent="0" algn="l">
-              <a:buNone/>
-            </a:pPr>
-            <a:r>
-              <a:rPr lang="en-US" sz="1000" i="1" dirty="0">
-                <a:solidFill>
-                  <a:srgbClr val="FFFFFF">
-                    <a:alpha val="70000"/>
-                  </a:srgbClr>
-                </a:solidFill>
-                <a:latin typeface="Poppins" pitchFamily="34" charset="0"/>
-                <a:ea typeface="Poppins" pitchFamily="34" charset="-122"/>
-                <a:cs typeface="Poppins" pitchFamily="34" charset="-120"/>
-              </a:rPr>
-              <a:t>Validated on a held-out split with no selection leakage, against a bicubic baseline, with failure cases analysed.</a:t>
-            </a:r>
-            <a:endParaRPr lang="en-US" sz="1200" dirty="0"/>
-          </a:p>
-        </p:txBody>
-      </p:sp>
-      <p:sp>
-        <p:nvSpPr>
-          <p:cNvPr id="20" name="Shape 14"/>
-          <p:cNvSpPr/>
-          <p:nvPr/>
-        </p:nvSpPr>
-        <p:spPr>
-          <a:xfrm>
-            <a:off x="961949" y="4155034"/>
-            <a:ext cx="476402" cy="476402"/>
-          </a:xfrm>
-          <a:prstGeom prst="ellipse">
-            <a:avLst/>
-          </a:prstGeom>
-          <a:solidFill>
-            <a:srgbClr val="273383">
-              <a:alpha val="50000"/>
-            </a:srgbClr>
-          </a:solidFill>
-          <a:ln w="25400">
-            <a:solidFill>
-              <a:srgbClr val="AEFF82"/>
-            </a:solidFill>
-            <a:prstDash val="solid"/>
-          </a:ln>
-        </p:spPr>
-        <p:txBody>
-          <a:bodyPr/>
-          <a:lstStyle/>
-          <a:p>
-            <a:endParaRPr lang="en-IN"/>
-          </a:p>
-        </p:txBody>
-      </p:sp>
-      <p:pic>
-        <p:nvPicPr>
-          <p:cNvPr id="21" name="Image 4" descr="preencoded.png"/>
-          <p:cNvPicPr>
-            <a:picLocks noChangeAspect="1"/>
-          </p:cNvPicPr>
-          <p:nvPr/>
-        </p:nvPicPr>
-        <p:blipFill>
-          <a:blip r:embed="rId7"/>
-          <a:srcRect l="-80" r="-80"/>
-          <a:stretch/>
-        </p:blipFill>
-        <p:spPr>
-          <a:xfrm>
-            <a:off x="1057046" y="4279392"/>
-            <a:ext cx="286207" cy="228600"/>
-          </a:xfrm>
-          <a:prstGeom prst="rect">
-            <a:avLst/>
-          </a:prstGeom>
-        </p:spPr>
-      </p:pic>
-      <p:sp>
-        <p:nvSpPr>
-          <p:cNvPr id="22" name="Text 15"/>
-          <p:cNvSpPr txBox="1"/>
-          <p:nvPr/>
-        </p:nvSpPr>
-        <p:spPr>
-          <a:xfrm>
-            <a:off x="1628546" y="4155034"/>
-            <a:ext cx="2343607" cy="267005"/>
-          </a:xfrm>
-          <a:prstGeom prst="rect">
-            <a:avLst/>
-          </a:prstGeom>
-          <a:noFill/>
-          <a:ln/>
-        </p:spPr>
-        <p:txBody>
-          <a:bodyPr wrap="square" lIns="0" tIns="0" rIns="0" bIns="0" rtlCol="0" anchor="ctr"/>
-          <a:lstStyle/>
-          <a:p>
-            <a:pPr marL="0" indent="0" algn="l">
-              <a:buNone/>
-            </a:pPr>
-            <a:r>
-              <a:rPr lang="en-US" sz="1500" b="1" dirty="0">
-                <a:solidFill>
-                  <a:srgbClr val="88E555"/>
-                </a:solidFill>
-                <a:latin typeface="Poppins" pitchFamily="34" charset="0"/>
-                <a:ea typeface="Poppins" pitchFamily="34" charset="-122"/>
-                <a:cs typeface="Poppins" pitchFamily="34" charset="-120"/>
-              </a:rPr>
-              <a:t>References &amp; Citations</a:t>
-            </a:r>
-            <a:endParaRPr lang="en-US" sz="1500" dirty="0"/>
-          </a:p>
-        </p:txBody>
-      </p:sp>
-      <p:sp>
-        <p:nvSpPr>
-          <p:cNvPr id="23" name="Text 16"/>
-          <p:cNvSpPr txBox="1"/>
-          <p:nvPr/>
-        </p:nvSpPr>
-        <p:spPr>
-          <a:xfrm>
-            <a:off x="1628546" y="4497934"/>
-            <a:ext cx="2767889" cy="191110"/>
-          </a:xfrm>
-          <a:prstGeom prst="rect">
-            <a:avLst/>
-          </a:prstGeom>
-          <a:noFill/>
-          <a:ln/>
-        </p:spPr>
-        <p:txBody>
-          <a:bodyPr wrap="square" lIns="0" tIns="0" rIns="0" bIns="0" rtlCol="0" anchor="ctr"/>
-          <a:lstStyle/>
-          <a:p>
-            <a:pPr marL="0" indent="0" algn="l">
-              <a:buNone/>
-            </a:pPr>
-            <a:r>
-              <a:rPr lang="en-US" sz="1000" dirty="0">
-                <a:solidFill>
-                  <a:srgbClr val="D1D5DB"/>
-                </a:solidFill>
-                <a:latin typeface="Poppins" pitchFamily="34" charset="0"/>
-                <a:ea typeface="Poppins" pitchFamily="34" charset="-122"/>
-                <a:cs typeface="Poppins" pitchFamily="34" charset="-120"/>
-              </a:rPr>
-              <a:t>The three papers behind our architecture, our upsampler and our perceptual metric.</a:t>
-            </a:r>
-            <a:endParaRPr lang="en-US" sz="1000" dirty="0"/>
-          </a:p>
-        </p:txBody>
-      </p:sp>
-      <p:sp>
-        <p:nvSpPr>
-          <p:cNvPr id="24" name="Shape 17"/>
-          <p:cNvSpPr/>
-          <p:nvPr/>
-        </p:nvSpPr>
-        <p:spPr>
-          <a:xfrm>
-            <a:off x="1628546" y="4764938"/>
-            <a:ext cx="9601200" cy="1410005"/>
-          </a:xfrm>
-          <a:prstGeom prst="roundRect">
-            <a:avLst>
-              <a:gd name="adj" fmla="val 3505"/>
-            </a:avLst>
-          </a:prstGeom>
-          <a:solidFill>
-            <a:srgbClr val="1E3A8A">
-              <a:alpha val="40000"/>
-            </a:srgbClr>
-          </a:solidFill>
-          <a:ln w="12700">
-            <a:solidFill>
-              <a:srgbClr val="1D4ED8"/>
-            </a:solidFill>
-            <a:prstDash val="solid"/>
-          </a:ln>
-        </p:spPr>
-        <p:txBody>
-          <a:bodyPr/>
-          <a:lstStyle/>
-          <a:p>
-            <a:endParaRPr lang="en-IN"/>
-          </a:p>
-        </p:txBody>
-      </p:sp>
-      <p:sp>
-        <p:nvSpPr>
-          <p:cNvPr id="25" name="Shape 18"/>
-          <p:cNvSpPr/>
-          <p:nvPr/>
-        </p:nvSpPr>
-        <p:spPr>
-          <a:xfrm>
-            <a:off x="1790395" y="5232197"/>
-            <a:ext cx="9277502" cy="9144"/>
-          </a:xfrm>
-          <a:prstGeom prst="rect">
-            <a:avLst/>
-          </a:prstGeom>
-          <a:solidFill>
-            <a:srgbClr val="1E40AF">
-              <a:alpha val="30000"/>
-            </a:srgbClr>
-          </a:solidFill>
-          <a:ln/>
-        </p:spPr>
-        <p:txBody>
-          <a:bodyPr/>
-          <a:lstStyle/>
-          <a:p>
-            <a:endParaRPr lang="en-IN"/>
-          </a:p>
-        </p:txBody>
-      </p:sp>
-      <p:sp>
-        <p:nvSpPr>
-          <p:cNvPr id="26" name="Text 19"/>
-          <p:cNvSpPr txBox="1"/>
-          <p:nvPr/>
-        </p:nvSpPr>
-        <p:spPr>
-          <a:xfrm>
-            <a:off x="1792224" y="4846320"/>
-            <a:ext cx="9235440" cy="365760"/>
-          </a:xfrm>
-          <a:prstGeom prst="rect">
-            <a:avLst/>
-          </a:prstGeom>
-          <a:noFill/>
-          <a:ln/>
-        </p:spPr>
-        <p:txBody>
-          <a:bodyPr wrap="square" lIns="0" tIns="0" rIns="0" bIns="0" rtlCol="0" anchor="t"/>
-          <a:lstStyle/>
-          <a:p>
-            <a:pPr marL="0" indent="0" algn="l">
-              <a:buNone/>
-            </a:pPr>
-            <a:r>
-              <a:rPr lang="en-US" sz="1000" dirty="0">
-                <a:solidFill>
-                  <a:srgbClr val="FFFFFF">
-                    <a:alpha val="80000"/>
-                  </a:srgbClr>
-                </a:solidFill>
-                <a:latin typeface="Poppins" pitchFamily="34" charset="0"/>
-                <a:ea typeface="Poppins" pitchFamily="34" charset="-122"/>
-                <a:cs typeface="Poppins" pitchFamily="34" charset="-120"/>
-              </a:rPr>
-              <a:t>Ref 1: Chen et al., Simple Baselines for Image Restoration (NAFNet), ECCV 2022 - arxiv.org/abs/2204.04676</a:t>
-            </a:r>
-            <a:endParaRPr lang="en-US" sz="1200" dirty="0"/>
-          </a:p>
-        </p:txBody>
-      </p:sp>
-      <p:sp>
-        <p:nvSpPr>
-          <p:cNvPr id="27" name="Shape 20"/>
-          <p:cNvSpPr/>
-          <p:nvPr/>
-        </p:nvSpPr>
-        <p:spPr>
-          <a:xfrm>
-            <a:off x="1790395" y="5661050"/>
-            <a:ext cx="9277502" cy="9144"/>
-          </a:xfrm>
-          <a:prstGeom prst="rect">
-            <a:avLst/>
-          </a:prstGeom>
-          <a:solidFill>
-            <a:srgbClr val="1E40AF">
-              <a:alpha val="30000"/>
-            </a:srgbClr>
-          </a:solidFill>
-          <a:ln/>
-        </p:spPr>
-        <p:txBody>
-          <a:bodyPr/>
-          <a:lstStyle/>
-          <a:p>
-            <a:endParaRPr lang="en-IN"/>
-          </a:p>
-        </p:txBody>
-      </p:sp>
-      <p:sp>
-        <p:nvSpPr>
-          <p:cNvPr id="28" name="Text 21"/>
-          <p:cNvSpPr txBox="1"/>
-          <p:nvPr/>
-        </p:nvSpPr>
-        <p:spPr>
-          <a:xfrm>
-            <a:off x="1792224" y="5303520"/>
-            <a:ext cx="9235440" cy="365760"/>
-          </a:xfrm>
-          <a:prstGeom prst="rect">
-            <a:avLst/>
-          </a:prstGeom>
-          <a:noFill/>
-          <a:ln/>
-        </p:spPr>
-        <p:txBody>
-          <a:bodyPr wrap="square" lIns="0" tIns="0" rIns="0" bIns="0" rtlCol="0" anchor="t"/>
-          <a:lstStyle/>
-          <a:p>
-            <a:pPr marL="0" indent="0" algn="l">
-              <a:buNone/>
-            </a:pPr>
-            <a:r>
-              <a:rPr lang="en-US" sz="1000" dirty="0">
-                <a:solidFill>
-                  <a:srgbClr val="FFFFFF">
-                    <a:alpha val="80000"/>
-                  </a:srgbClr>
-                </a:solidFill>
-                <a:latin typeface="Poppins" pitchFamily="34" charset="0"/>
-                <a:ea typeface="Poppins" pitchFamily="34" charset="-122"/>
-                <a:cs typeface="Poppins" pitchFamily="34" charset="-120"/>
-              </a:rPr>
-              <a:t>Ref 2: Zhang et al., The Unreasonable Effectiveness of Deep Features as a Perceptual Metric (LPIPS), CVPR 2018</a:t>
-            </a:r>
-            <a:endParaRPr lang="en-US" sz="1200" dirty="0"/>
-          </a:p>
-        </p:txBody>
-      </p:sp>
-      <p:sp>
-        <p:nvSpPr>
-          <p:cNvPr id="29" name="Text 22"/>
-          <p:cNvSpPr txBox="1"/>
-          <p:nvPr/>
-        </p:nvSpPr>
-        <p:spPr>
-          <a:xfrm>
-            <a:off x="1792224" y="5742432"/>
-            <a:ext cx="9235440" cy="365760"/>
-          </a:xfrm>
-          <a:prstGeom prst="rect">
-            <a:avLst/>
-          </a:prstGeom>
-          <a:noFill/>
-          <a:ln/>
-        </p:spPr>
-        <p:txBody>
-          <a:bodyPr wrap="square" lIns="0" tIns="0" rIns="0" bIns="0" rtlCol="0" anchor="t"/>
-          <a:lstStyle/>
-          <a:p>
-            <a:pPr marL="0" indent="0" algn="l">
-              <a:buNone/>
-            </a:pPr>
-            <a:r>
-              <a:rPr lang="en-US" sz="1000" dirty="0">
-                <a:solidFill>
-                  <a:srgbClr val="FFFFFF">
-                    <a:alpha val="80000"/>
-                  </a:srgbClr>
-                </a:solidFill>
-                <a:latin typeface="Poppins" pitchFamily="34" charset="0"/>
-                <a:ea typeface="Poppins" pitchFamily="34" charset="-122"/>
-                <a:cs typeface="Poppins" pitchFamily="34" charset="-120"/>
-              </a:rPr>
-              <a:t>Ref 3: Shi et al., Real-Time Single Image Super-Resolution Using an Efficient Sub-Pixel CNN, CVPR 2016</a:t>
-            </a:r>
-            <a:endParaRPr lang="en-US" sz="1200" dirty="0"/>
-          </a:p>
-        </p:txBody>
-      </p:sp>
-      <p:pic>
-        <p:nvPicPr>
-          <p:cNvPr id="30" name="Picture 29">
-            <a:extLst>
-              <a:ext uri="{FF2B5EF4-FFF2-40B4-BE49-F238E27FC236}">
-                <a16:creationId xmlns:a16="http://schemas.microsoft.com/office/drawing/2014/main" id="{135E3709-F1C8-6E84-EA51-720EFCF71B26}"/>
-              </a:ext>
-            </a:extLst>
-          </p:cNvPr>
-          <p:cNvPicPr>
-            <a:picLocks noChangeAspect="1"/>
-          </p:cNvPicPr>
-          <p:nvPr/>
-        </p:nvPicPr>
-        <p:blipFill>
-          <a:blip r:embed="rId8"/>
-          <a:stretch>
-            <a:fillRect/>
-          </a:stretch>
-        </p:blipFill>
-        <p:spPr>
-          <a:xfrm>
-            <a:off x="5292164" y="227710"/>
-            <a:ext cx="1607366" cy="783591"/>
-          </a:xfrm>
-          <a:prstGeom prst="rect">
-            <a:avLst/>
-          </a:prstGeom>
-        </p:spPr>
-      </p:pic>
-      <p:sp>
-        <p:nvSpPr>
-          <p:cNvPr id="32" name="Shape 1">
-            <a:extLst>
-              <a:ext uri="{FF2B5EF4-FFF2-40B4-BE49-F238E27FC236}">
-                <a16:creationId xmlns:a16="http://schemas.microsoft.com/office/drawing/2014/main" id="{3E27E131-AC1D-E75C-0267-02565ACC1BC3}"/>
-              </a:ext>
-            </a:extLst>
-          </p:cNvPr>
-          <p:cNvSpPr/>
-          <p:nvPr/>
-        </p:nvSpPr>
-        <p:spPr>
-          <a:xfrm>
-            <a:off x="571500" y="259714"/>
-            <a:ext cx="11048695" cy="857707"/>
-          </a:xfrm>
-          <a:prstGeom prst="roundRect">
-            <a:avLst>
-              <a:gd name="adj" fmla="val 9476"/>
-            </a:avLst>
-          </a:prstGeom>
-          <a:solidFill>
-            <a:srgbClr val="FFFFFF">
-              <a:alpha val="95000"/>
-            </a:srgbClr>
-          </a:solidFill>
-          <a:ln/>
-          <a:effectLst>
-            <a:outerShdw blurRad="63500" dist="38100" dir="5400000" algn="bl" rotWithShape="0">
-              <a:srgbClr val="000000">
-                <a:alpha val="10000"/>
-              </a:srgbClr>
-            </a:outerShdw>
-          </a:effectLst>
-        </p:spPr>
-        <p:txBody>
-          <a:bodyPr/>
-          <a:lstStyle/>
-          <a:p>
-            <a:endParaRPr lang="en-IN"/>
-          </a:p>
-        </p:txBody>
-      </p:sp>
-      <p:pic>
-        <p:nvPicPr>
-          <p:cNvPr id="33" name="Picture 32">
-            <a:extLst>
-              <a:ext uri="{FF2B5EF4-FFF2-40B4-BE49-F238E27FC236}">
-                <a16:creationId xmlns:a16="http://schemas.microsoft.com/office/drawing/2014/main" id="{1D876DBE-D402-1B41-B952-69F6F5BF98C9}"/>
-              </a:ext>
-            </a:extLst>
-          </p:cNvPr>
-          <p:cNvPicPr>
-            <a:picLocks noChangeAspect="1"/>
-          </p:cNvPicPr>
-          <p:nvPr/>
-        </p:nvPicPr>
-        <p:blipFill>
-          <a:blip r:embed="rId9">
-            <a:extLst>
-              <a:ext uri="{28A0092B-C50C-407E-A947-70E740481C1C}">
-                <a14:useLocalDpi xmlns:a14="http://schemas.microsoft.com/office/drawing/2010/main" val="0"/>
-              </a:ext>
-            </a:extLst>
-          </a:blip>
-          <a:stretch>
-            <a:fillRect/>
-          </a:stretch>
-        </p:blipFill>
-        <p:spPr>
-          <a:xfrm>
-            <a:off x="1514101" y="390016"/>
-            <a:ext cx="9163491" cy="586435"/>
-          </a:xfrm>
-          <a:prstGeom prst="rect">
-            <a:avLst/>
-          </a:prstGeom>
-        </p:spPr>
-      </p:pic>
-    </p:spTree>
-  </p:cSld>
-  <p:clrMapOvr>
-    <a:masterClrMapping/>
-  </p:clrMapOvr>
-</p:sld>
-</file>
-
-<file path=ppt/slides/slide2.xml><?xml version="1.0" encoding="utf-8"?>
-<p:sld xmlns:a="http://schemas.openxmlformats.org/drawingml/2006/main" xmlns:r="http://schemas.openxmlformats.org/officeDocument/2006/relationships" xmlns:p="http://schemas.openxmlformats.org/presentationml/2006/main">
   <p:cSld name="Slide 2">
     <p:spTree>
       <p:nvGrpSpPr>
@@ -6609,7 +4661,7 @@
           <p:cNvPr id="70" name="Shape 1">
             <a:extLst>
               <a:ext uri="{FF2B5EF4-FFF2-40B4-BE49-F238E27FC236}">
-                <a16:creationId xmlns:a16="http://schemas.microsoft.com/office/drawing/2014/main" id="{780937B3-EB04-4CBA-C636-AF115BC1E358}"/>
+                <a16:creationId xmlns:a16="http://schemas.microsoft.com/office/drawing/2014/main" xmlns="" id="{780937B3-EB04-4CBA-C636-AF115BC1E358}"/>
               </a:ext>
             </a:extLst>
           </p:cNvPr>
@@ -6653,7 +4705,7 @@
           <p:cNvPr id="5" name="Picture 4">
             <a:extLst>
               <a:ext uri="{FF2B5EF4-FFF2-40B4-BE49-F238E27FC236}">
-                <a16:creationId xmlns:a16="http://schemas.microsoft.com/office/drawing/2014/main" id="{5F67FE6B-8CE4-2744-DE3C-E456350E62E4}"/>
+                <a16:creationId xmlns:a16="http://schemas.microsoft.com/office/drawing/2014/main" xmlns="" id="{5F67FE6B-8CE4-2744-DE3C-E456350E62E4}"/>
               </a:ext>
             </a:extLst>
           </p:cNvPr>
@@ -6692,7 +4744,7 @@
 </p:sld>
 </file>
 
-<file path=ppt/slides/slide3.xml><?xml version="1.0" encoding="utf-8"?>
+<file path=ppt/slides/slide2.xml><?xml version="1.0" encoding="utf-8"?>
 <p:sld xmlns:a="http://schemas.openxmlformats.org/drawingml/2006/main" xmlns:r="http://schemas.openxmlformats.org/officeDocument/2006/relationships" xmlns:p="http://schemas.openxmlformats.org/presentationml/2006/main">
   <p:cSld name="Slide 3">
     <p:spTree>
@@ -6821,7 +4873,18 @@
                 <a:ea typeface="Poppins" pitchFamily="34" charset="-122"/>
                 <a:cs typeface="Poppins" pitchFamily="34" charset="-120"/>
               </a:rPr>
-              <a:t>Problem Statement Addressed</a:t>
+              <a:t>Problem </a:t>
+            </a:r>
+            <a:r>
+              <a:rPr lang="en-US" sz="2600" b="1" dirty="0" smtClean="0">
+                <a:solidFill>
+                  <a:srgbClr val="FFFFFF"/>
+                </a:solidFill>
+                <a:latin typeface="Poppins" pitchFamily="34" charset="0"/>
+                <a:ea typeface="Poppins" pitchFamily="34" charset="-122"/>
+                <a:cs typeface="Poppins" pitchFamily="34" charset="-120"/>
+              </a:rPr>
+              <a:t>Statement</a:t>
             </a:r>
             <a:endParaRPr lang="en-US" sz="2600" dirty="0"/>
           </a:p>
@@ -7093,8 +5156,8 @@
         </p:nvSpPr>
         <p:spPr>
           <a:xfrm>
-            <a:off x="961949" y="3584448"/>
-            <a:ext cx="10267798" cy="1645920"/>
+            <a:off x="961949" y="3717037"/>
+            <a:ext cx="10267798" cy="1348739"/>
           </a:xfrm>
           <a:prstGeom prst="roundRect">
             <a:avLst>
@@ -7129,7 +5192,7 @@
         </p:nvSpPr>
         <p:spPr>
           <a:xfrm>
-            <a:off x="1200607" y="3703320"/>
+            <a:off x="1200607" y="3759301"/>
             <a:ext cx="1690726" cy="191110"/>
           </a:xfrm>
           <a:prstGeom prst="rect">
@@ -7275,7 +5338,7 @@
           <p:cNvPr id="20" name="Picture 19">
             <a:extLst>
               <a:ext uri="{FF2B5EF4-FFF2-40B4-BE49-F238E27FC236}">
-                <a16:creationId xmlns:a16="http://schemas.microsoft.com/office/drawing/2014/main" id="{E9F13985-00B4-3FE2-69FB-BA5F88420137}"/>
+                <a16:creationId xmlns:a16="http://schemas.microsoft.com/office/drawing/2014/main" xmlns="" id="{E9F13985-00B4-3FE2-69FB-BA5F88420137}"/>
               </a:ext>
             </a:extLst>
           </p:cNvPr>
@@ -7305,7 +5368,7 @@
           <p:cNvPr id="22" name="Shape 1">
             <a:extLst>
               <a:ext uri="{FF2B5EF4-FFF2-40B4-BE49-F238E27FC236}">
-                <a16:creationId xmlns:a16="http://schemas.microsoft.com/office/drawing/2014/main" id="{8B3789FB-4EC6-29BB-8AB4-B514BCE88A9C}"/>
+                <a16:creationId xmlns:a16="http://schemas.microsoft.com/office/drawing/2014/main" xmlns="" id="{8B3789FB-4EC6-29BB-8AB4-B514BCE88A9C}"/>
               </a:ext>
             </a:extLst>
           </p:cNvPr>
@@ -7349,7 +5412,7 @@
           <p:cNvPr id="5" name="Picture 4">
             <a:extLst>
               <a:ext uri="{FF2B5EF4-FFF2-40B4-BE49-F238E27FC236}">
-                <a16:creationId xmlns:a16="http://schemas.microsoft.com/office/drawing/2014/main" id="{AFA5626A-1768-0BB6-2B3B-C29607998D96}"/>
+                <a16:creationId xmlns:a16="http://schemas.microsoft.com/office/drawing/2014/main" xmlns="" id="{AFA5626A-1768-0BB6-2B3B-C29607998D96}"/>
               </a:ext>
             </a:extLst>
           </p:cNvPr>
@@ -7396,8 +5459,8 @@
         </p:blipFill>
         <p:spPr>
           <a:xfrm>
-            <a:off x="4480560" y="5349240"/>
-            <a:ext cx="2468880" cy="1037937"/>
+            <a:off x="3073400" y="5202938"/>
+            <a:ext cx="4614333" cy="1037937"/>
           </a:xfrm>
           <a:prstGeom prst="rect">
             <a:avLst/>
@@ -7412,7 +5475,7 @@
 </p:sld>
 </file>
 
-<file path=ppt/slides/slide4.xml><?xml version="1.0" encoding="utf-8"?>
+<file path=ppt/slides/slide3.xml><?xml version="1.0" encoding="utf-8"?>
 <p:sld xmlns:a="http://schemas.openxmlformats.org/drawingml/2006/main" xmlns:r="http://schemas.openxmlformats.org/officeDocument/2006/relationships" xmlns:p="http://schemas.openxmlformats.org/presentationml/2006/main">
   <p:cSld name="Slide 4">
     <p:spTree>
@@ -7799,7 +5862,7 @@
         </p:nvSpPr>
         <p:spPr>
           <a:xfrm>
-            <a:off x="961949" y="2412187"/>
+            <a:off x="907338" y="2147011"/>
             <a:ext cx="571500" cy="571500"/>
           </a:xfrm>
           <a:prstGeom prst="ellipse">
@@ -7840,7 +5903,7 @@
         </p:blipFill>
         <p:spPr>
           <a:xfrm>
-            <a:off x="1162202" y="2583180"/>
+            <a:off x="1110690" y="2374240"/>
             <a:ext cx="171907" cy="228600"/>
           </a:xfrm>
           <a:prstGeom prst="rect">
@@ -7856,7 +5919,7 @@
         </p:nvSpPr>
         <p:spPr>
           <a:xfrm>
-            <a:off x="961949" y="3183941"/>
+            <a:off x="961949" y="2771547"/>
             <a:ext cx="9813341" cy="629107"/>
           </a:xfrm>
           <a:prstGeom prst="rect">
@@ -7897,7 +5960,7 @@
         </p:nvSpPr>
         <p:spPr>
           <a:xfrm>
-            <a:off x="961949" y="3840480"/>
+            <a:off x="907338" y="3601365"/>
             <a:ext cx="10267798" cy="1133856"/>
           </a:xfrm>
           <a:prstGeom prst="roundRect">
@@ -7933,7 +5996,7 @@
         </p:nvSpPr>
         <p:spPr>
           <a:xfrm>
-            <a:off x="1162202" y="3959352"/>
+            <a:off x="961949" y="3679546"/>
             <a:ext cx="1996135" cy="191110"/>
           </a:xfrm>
           <a:prstGeom prst="rect">
@@ -7972,7 +6035,7 @@
         </p:nvSpPr>
         <p:spPr>
           <a:xfrm>
-            <a:off x="1162202" y="4224528"/>
+            <a:off x="961949" y="3968953"/>
             <a:ext cx="7677302" cy="658368"/>
           </a:xfrm>
           <a:prstGeom prst="rect">
@@ -8060,7 +6123,7 @@
         </p:nvSpPr>
         <p:spPr>
           <a:xfrm>
-            <a:off x="961949" y="5047488"/>
+            <a:off x="907338" y="4886096"/>
             <a:ext cx="10267798" cy="1307592"/>
           </a:xfrm>
           <a:prstGeom prst="roundRect">
@@ -8096,7 +6159,7 @@
         </p:nvSpPr>
         <p:spPr>
           <a:xfrm>
-            <a:off x="1162202" y="5166359"/>
+            <a:off x="1035202" y="4955133"/>
             <a:ext cx="1548079" cy="191110"/>
           </a:xfrm>
           <a:prstGeom prst="rect">
@@ -8135,7 +6198,7 @@
         </p:nvSpPr>
         <p:spPr>
           <a:xfrm>
-            <a:off x="1162202" y="5431536"/>
+            <a:off x="1035202" y="5215280"/>
             <a:ext cx="8458200" cy="832103"/>
           </a:xfrm>
           <a:prstGeom prst="rect">
@@ -8242,7 +6305,7 @@
           <p:cNvPr id="23" name="Picture 22">
             <a:extLst>
               <a:ext uri="{FF2B5EF4-FFF2-40B4-BE49-F238E27FC236}">
-                <a16:creationId xmlns:a16="http://schemas.microsoft.com/office/drawing/2014/main" id="{C033FF08-6369-1C95-EB39-A51D568DF008}"/>
+                <a16:creationId xmlns:a16="http://schemas.microsoft.com/office/drawing/2014/main" xmlns="" id="{C033FF08-6369-1C95-EB39-A51D568DF008}"/>
               </a:ext>
             </a:extLst>
           </p:cNvPr>
@@ -8272,7 +6335,7 @@
           <p:cNvPr id="25" name="Shape 1">
             <a:extLst>
               <a:ext uri="{FF2B5EF4-FFF2-40B4-BE49-F238E27FC236}">
-                <a16:creationId xmlns:a16="http://schemas.microsoft.com/office/drawing/2014/main" id="{82B7216B-04F1-E2CC-935F-9AA2CE5B9E43}"/>
+                <a16:creationId xmlns:a16="http://schemas.microsoft.com/office/drawing/2014/main" xmlns="" id="{82B7216B-04F1-E2CC-935F-9AA2CE5B9E43}"/>
               </a:ext>
             </a:extLst>
           </p:cNvPr>
@@ -8316,7 +6379,7 @@
           <p:cNvPr id="26" name="Picture 25">
             <a:extLst>
               <a:ext uri="{FF2B5EF4-FFF2-40B4-BE49-F238E27FC236}">
-                <a16:creationId xmlns:a16="http://schemas.microsoft.com/office/drawing/2014/main" id="{7743FE56-9400-E309-F93C-96E3C8B4AF82}"/>
+                <a16:creationId xmlns:a16="http://schemas.microsoft.com/office/drawing/2014/main" xmlns="" id="{7743FE56-9400-E309-F93C-96E3C8B4AF82}"/>
               </a:ext>
             </a:extLst>
           </p:cNvPr>
@@ -8355,7 +6418,7 @@
 </p:sld>
 </file>
 
-<file path=ppt/slides/slide5.xml><?xml version="1.0" encoding="utf-8"?>
+<file path=ppt/slides/slide4.xml><?xml version="1.0" encoding="utf-8"?>
 <p:sld xmlns:a="http://schemas.openxmlformats.org/drawingml/2006/main" xmlns:r="http://schemas.openxmlformats.org/officeDocument/2006/relationships" xmlns:p="http://schemas.openxmlformats.org/presentationml/2006/main">
   <p:cSld name="Slide 5">
     <p:spTree>
@@ -8975,7 +7038,7 @@
           <p:cNvPr id="20" name="Picture 19">
             <a:extLst>
               <a:ext uri="{FF2B5EF4-FFF2-40B4-BE49-F238E27FC236}">
-                <a16:creationId xmlns:a16="http://schemas.microsoft.com/office/drawing/2014/main" id="{667D8EB9-0510-8E20-AE50-3B9EC8704685}"/>
+                <a16:creationId xmlns:a16="http://schemas.microsoft.com/office/drawing/2014/main" xmlns="" id="{667D8EB9-0510-8E20-AE50-3B9EC8704685}"/>
               </a:ext>
             </a:extLst>
           </p:cNvPr>
@@ -9005,7 +7068,7 @@
           <p:cNvPr id="22" name="Shape 1">
             <a:extLst>
               <a:ext uri="{FF2B5EF4-FFF2-40B4-BE49-F238E27FC236}">
-                <a16:creationId xmlns:a16="http://schemas.microsoft.com/office/drawing/2014/main" id="{50164B49-38DE-6195-0A8B-DC6EC6DA2457}"/>
+                <a16:creationId xmlns:a16="http://schemas.microsoft.com/office/drawing/2014/main" xmlns="" id="{50164B49-38DE-6195-0A8B-DC6EC6DA2457}"/>
               </a:ext>
             </a:extLst>
           </p:cNvPr>
@@ -9049,7 +7112,7 @@
           <p:cNvPr id="23" name="Picture 22">
             <a:extLst>
               <a:ext uri="{FF2B5EF4-FFF2-40B4-BE49-F238E27FC236}">
-                <a16:creationId xmlns:a16="http://schemas.microsoft.com/office/drawing/2014/main" id="{18A68BD0-3127-AC0B-80B4-CA2643B37A26}"/>
+                <a16:creationId xmlns:a16="http://schemas.microsoft.com/office/drawing/2014/main" xmlns="" id="{18A68BD0-3127-AC0B-80B4-CA2643B37A26}"/>
               </a:ext>
             </a:extLst>
           </p:cNvPr>
@@ -9112,7 +7175,7 @@
 </p:sld>
 </file>
 
-<file path=ppt/slides/slide6.xml><?xml version="1.0" encoding="utf-8"?>
+<file path=ppt/slides/slide5.xml><?xml version="1.0" encoding="utf-8"?>
 <p:sld xmlns:a="http://schemas.openxmlformats.org/drawingml/2006/main" xmlns:r="http://schemas.openxmlformats.org/officeDocument/2006/relationships" xmlns:p="http://schemas.openxmlformats.org/presentationml/2006/main">
   <p:cSld name="Slide 6">
     <p:spTree>
@@ -9964,7 +8027,7 @@
           <p:cNvPr id="23" name="Picture 22">
             <a:extLst>
               <a:ext uri="{FF2B5EF4-FFF2-40B4-BE49-F238E27FC236}">
-                <a16:creationId xmlns:a16="http://schemas.microsoft.com/office/drawing/2014/main" id="{48B85B4A-4413-5424-84AE-2AF429F27FBC}"/>
+                <a16:creationId xmlns:a16="http://schemas.microsoft.com/office/drawing/2014/main" xmlns="" id="{48B85B4A-4413-5424-84AE-2AF429F27FBC}"/>
               </a:ext>
             </a:extLst>
           </p:cNvPr>
@@ -9994,7 +8057,7 @@
           <p:cNvPr id="25" name="Shape 1">
             <a:extLst>
               <a:ext uri="{FF2B5EF4-FFF2-40B4-BE49-F238E27FC236}">
-                <a16:creationId xmlns:a16="http://schemas.microsoft.com/office/drawing/2014/main" id="{BB3A3471-21A6-8A80-8399-32E98C63F186}"/>
+                <a16:creationId xmlns:a16="http://schemas.microsoft.com/office/drawing/2014/main" xmlns="" id="{BB3A3471-21A6-8A80-8399-32E98C63F186}"/>
               </a:ext>
             </a:extLst>
           </p:cNvPr>
@@ -10038,7 +8101,7 @@
           <p:cNvPr id="26" name="Picture 25">
             <a:extLst>
               <a:ext uri="{FF2B5EF4-FFF2-40B4-BE49-F238E27FC236}">
-                <a16:creationId xmlns:a16="http://schemas.microsoft.com/office/drawing/2014/main" id="{1ADA517E-8996-A444-E540-A2F9B8F98D2B}"/>
+                <a16:creationId xmlns:a16="http://schemas.microsoft.com/office/drawing/2014/main" xmlns="" id="{1ADA517E-8996-A444-E540-A2F9B8F98D2B}"/>
               </a:ext>
             </a:extLst>
           </p:cNvPr>
@@ -10077,7 +8140,7 @@
 </p:sld>
 </file>
 
-<file path=ppt/slides/slide7.xml><?xml version="1.0" encoding="utf-8"?>
+<file path=ppt/slides/slide6.xml><?xml version="1.0" encoding="utf-8"?>
 <p:sld xmlns:a="http://schemas.openxmlformats.org/drawingml/2006/main" xmlns:r="http://schemas.openxmlformats.org/officeDocument/2006/relationships" xmlns:p="http://schemas.openxmlformats.org/presentationml/2006/main">
   <p:cSld name="Slide 7">
     <p:spTree>
@@ -10901,7 +8964,7 @@
           <p:cNvPr id="25" name="Picture 24">
             <a:extLst>
               <a:ext uri="{FF2B5EF4-FFF2-40B4-BE49-F238E27FC236}">
-                <a16:creationId xmlns:a16="http://schemas.microsoft.com/office/drawing/2014/main" id="{C2A87E08-9934-FBF2-2F29-11A8271B362B}"/>
+                <a16:creationId xmlns:a16="http://schemas.microsoft.com/office/drawing/2014/main" xmlns="" id="{C2A87E08-9934-FBF2-2F29-11A8271B362B}"/>
               </a:ext>
             </a:extLst>
           </p:cNvPr>
@@ -10931,7 +8994,7 @@
           <p:cNvPr id="27" name="Shape 1">
             <a:extLst>
               <a:ext uri="{FF2B5EF4-FFF2-40B4-BE49-F238E27FC236}">
-                <a16:creationId xmlns:a16="http://schemas.microsoft.com/office/drawing/2014/main" id="{850BA2BE-D607-619F-6960-A71277019D3B}"/>
+                <a16:creationId xmlns:a16="http://schemas.microsoft.com/office/drawing/2014/main" xmlns="" id="{850BA2BE-D607-619F-6960-A71277019D3B}"/>
               </a:ext>
             </a:extLst>
           </p:cNvPr>
@@ -10975,7 +9038,7 @@
           <p:cNvPr id="28" name="Picture 27">
             <a:extLst>
               <a:ext uri="{FF2B5EF4-FFF2-40B4-BE49-F238E27FC236}">
-                <a16:creationId xmlns:a16="http://schemas.microsoft.com/office/drawing/2014/main" id="{C5D3E59C-FE74-F0BE-9B10-98C8003398BC}"/>
+                <a16:creationId xmlns:a16="http://schemas.microsoft.com/office/drawing/2014/main" xmlns="" id="{C5D3E59C-FE74-F0BE-9B10-98C8003398BC}"/>
               </a:ext>
             </a:extLst>
           </p:cNvPr>
@@ -11038,7 +9101,7 @@
 </p:sld>
 </file>
 
-<file path=ppt/slides/slide8.xml><?xml version="1.0" encoding="utf-8"?>
+<file path=ppt/slides/slide7.xml><?xml version="1.0" encoding="utf-8"?>
 <p:sld xmlns:a="http://schemas.openxmlformats.org/drawingml/2006/main" xmlns:r="http://schemas.openxmlformats.org/officeDocument/2006/relationships" xmlns:p="http://schemas.openxmlformats.org/presentationml/2006/main">
   <p:cSld name="Slide 8">
     <p:spTree>
@@ -11993,7 +10056,7 @@
           <p:cNvPr id="29" name="Picture 28">
             <a:extLst>
               <a:ext uri="{FF2B5EF4-FFF2-40B4-BE49-F238E27FC236}">
-                <a16:creationId xmlns:a16="http://schemas.microsoft.com/office/drawing/2014/main" id="{DA9CA506-8684-B4DC-6650-2E5F61A7B031}"/>
+                <a16:creationId xmlns:a16="http://schemas.microsoft.com/office/drawing/2014/main" xmlns="" id="{DA9CA506-8684-B4DC-6650-2E5F61A7B031}"/>
               </a:ext>
             </a:extLst>
           </p:cNvPr>
@@ -12023,7 +10086,7 @@
           <p:cNvPr id="31" name="Shape 1">
             <a:extLst>
               <a:ext uri="{FF2B5EF4-FFF2-40B4-BE49-F238E27FC236}">
-                <a16:creationId xmlns:a16="http://schemas.microsoft.com/office/drawing/2014/main" id="{10B6379C-1BCE-6784-4600-934501FC5F97}"/>
+                <a16:creationId xmlns:a16="http://schemas.microsoft.com/office/drawing/2014/main" xmlns="" id="{10B6379C-1BCE-6784-4600-934501FC5F97}"/>
               </a:ext>
             </a:extLst>
           </p:cNvPr>
@@ -12067,7 +10130,7 @@
           <p:cNvPr id="32" name="Picture 31">
             <a:extLst>
               <a:ext uri="{FF2B5EF4-FFF2-40B4-BE49-F238E27FC236}">
-                <a16:creationId xmlns:a16="http://schemas.microsoft.com/office/drawing/2014/main" id="{0D18A824-BCDE-0A33-4245-E3C168F9E6DD}"/>
+                <a16:creationId xmlns:a16="http://schemas.microsoft.com/office/drawing/2014/main" xmlns="" id="{0D18A824-BCDE-0A33-4245-E3C168F9E6DD}"/>
               </a:ext>
             </a:extLst>
           </p:cNvPr>
@@ -12091,6 +10154,934 @@
         <p:spPr>
           <a:xfrm>
             <a:off x="1514101" y="378206"/>
+            <a:ext cx="9163491" cy="586435"/>
+          </a:xfrm>
+          <a:prstGeom prst="rect">
+            <a:avLst/>
+          </a:prstGeom>
+        </p:spPr>
+      </p:pic>
+    </p:spTree>
+  </p:cSld>
+  <p:clrMapOvr>
+    <a:masterClrMapping/>
+  </p:clrMapOvr>
+</p:sld>
+</file>
+
+<file path=ppt/slides/slide8.xml><?xml version="1.0" encoding="utf-8"?>
+<p:sld xmlns:a="http://schemas.openxmlformats.org/drawingml/2006/main" xmlns:r="http://schemas.openxmlformats.org/officeDocument/2006/relationships" xmlns:p="http://schemas.openxmlformats.org/presentationml/2006/main">
+  <p:cSld>
+    <p:spTree>
+      <p:nvGrpSpPr>
+        <p:cNvPr id="1" name=""/>
+        <p:cNvGrpSpPr/>
+        <p:nvPr/>
+      </p:nvGrpSpPr>
+      <p:grpSpPr>
+        <a:xfrm>
+          <a:off x="0" y="0"/>
+          <a:ext cx="0" cy="0"/>
+          <a:chOff x="0" y="0"/>
+          <a:chExt cx="0" cy="0"/>
+        </a:xfrm>
+      </p:grpSpPr>
+      <p:sp>
+        <p:nvSpPr>
+          <p:cNvPr id="2" name="Shape 0"/>
+          <p:cNvSpPr/>
+          <p:nvPr/>
+        </p:nvSpPr>
+        <p:spPr>
+          <a:xfrm>
+            <a:off x="0" y="0"/>
+            <a:ext cx="12191695" cy="6858000"/>
+          </a:xfrm>
+          <a:prstGeom prst="rect">
+            <a:avLst/>
+          </a:prstGeom>
+          <a:solidFill>
+            <a:srgbClr val="000036"/>
+          </a:solidFill>
+          <a:ln/>
+        </p:spPr>
+        <p:txBody>
+          <a:bodyPr/>
+          <a:lstStyle/>
+          <a:p>
+            <a:endParaRPr lang="en-IN"/>
+          </a:p>
+        </p:txBody>
+      </p:sp>
+      <p:pic>
+        <p:nvPicPr>
+          <p:cNvPr id="3" name="Image 0" descr="preencoded.png"/>
+          <p:cNvPicPr>
+            <a:picLocks noChangeAspect="1"/>
+          </p:cNvPicPr>
+          <p:nvPr/>
+        </p:nvPicPr>
+        <p:blipFill>
+          <a:blip r:embed="rId3">
+            <a:alphaModFix amt="10000"/>
+          </a:blip>
+          <a:srcRect l="12327" r="12327"/>
+          <a:stretch/>
+        </p:blipFill>
+        <p:spPr>
+          <a:xfrm>
+            <a:off x="0" y="0"/>
+            <a:ext cx="12191695" cy="6858000"/>
+          </a:xfrm>
+          <a:prstGeom prst="rect">
+            <a:avLst/>
+          </a:prstGeom>
+        </p:spPr>
+      </p:pic>
+      <p:sp>
+        <p:nvSpPr>
+          <p:cNvPr id="4" name="Shape 1"/>
+          <p:cNvSpPr/>
+          <p:nvPr/>
+        </p:nvSpPr>
+        <p:spPr>
+          <a:xfrm>
+            <a:off x="571500" y="286207"/>
+            <a:ext cx="11048695" cy="666598"/>
+          </a:xfrm>
+          <a:prstGeom prst="roundRect">
+            <a:avLst>
+              <a:gd name="adj" fmla="val 15677"/>
+            </a:avLst>
+          </a:prstGeom>
+          <a:solidFill>
+            <a:srgbClr val="FFFFFF">
+              <a:alpha val="95000"/>
+            </a:srgbClr>
+          </a:solidFill>
+          <a:ln/>
+          <a:effectLst>
+            <a:outerShdw blurRad="63500" dist="38100" dir="5400000" algn="bl" rotWithShape="0">
+              <a:srgbClr val="000000">
+                <a:alpha val="10000"/>
+              </a:srgbClr>
+            </a:outerShdw>
+          </a:effectLst>
+        </p:spPr>
+        <p:txBody>
+          <a:bodyPr/>
+          <a:lstStyle/>
+          <a:p>
+            <a:endParaRPr lang="en-IN"/>
+          </a:p>
+        </p:txBody>
+      </p:sp>
+      <p:pic>
+        <p:nvPicPr>
+          <p:cNvPr id="5" name="Image 1" descr="preencoded.png"/>
+          <p:cNvPicPr>
+            <a:picLocks noChangeAspect="1"/>
+          </p:cNvPicPr>
+          <p:nvPr/>
+        </p:nvPicPr>
+        <p:blipFill>
+          <a:blip r:embed="rId4"/>
+          <a:srcRect t="10" b="10"/>
+          <a:stretch/>
+        </p:blipFill>
+        <p:spPr>
+          <a:xfrm>
+            <a:off x="857707" y="381305"/>
+            <a:ext cx="1266444" cy="476402"/>
+          </a:xfrm>
+          <a:prstGeom prst="rect">
+            <a:avLst/>
+          </a:prstGeom>
+        </p:spPr>
+      </p:pic>
+      <p:pic>
+        <p:nvPicPr>
+          <p:cNvPr id="6" name="Image 2" descr="preencoded.png"/>
+          <p:cNvPicPr>
+            <a:picLocks noChangeAspect="1"/>
+          </p:cNvPicPr>
+          <p:nvPr/>
+        </p:nvPicPr>
+        <p:blipFill>
+          <a:blip r:embed="rId5"/>
+          <a:srcRect/>
+          <a:stretch/>
+        </p:blipFill>
+        <p:spPr>
+          <a:xfrm>
+            <a:off x="10858500" y="381305"/>
+            <a:ext cx="476402" cy="476402"/>
+          </a:xfrm>
+          <a:prstGeom prst="rect">
+            <a:avLst/>
+          </a:prstGeom>
+        </p:spPr>
+      </p:pic>
+      <p:sp>
+        <p:nvSpPr>
+          <p:cNvPr id="7" name="Shape 2"/>
+          <p:cNvSpPr/>
+          <p:nvPr/>
+        </p:nvSpPr>
+        <p:spPr>
+          <a:xfrm>
+            <a:off x="571500" y="1333195"/>
+            <a:ext cx="75895" cy="409651"/>
+          </a:xfrm>
+          <a:prstGeom prst="rect">
+            <a:avLst/>
+          </a:prstGeom>
+          <a:solidFill>
+            <a:srgbClr val="88E555"/>
+          </a:solidFill>
+          <a:ln/>
+        </p:spPr>
+        <p:txBody>
+          <a:bodyPr/>
+          <a:lstStyle/>
+          <a:p>
+            <a:endParaRPr lang="en-IN"/>
+          </a:p>
+        </p:txBody>
+      </p:sp>
+      <p:sp>
+        <p:nvSpPr>
+          <p:cNvPr id="8" name="Text 3"/>
+          <p:cNvSpPr txBox="1"/>
+          <p:nvPr/>
+        </p:nvSpPr>
+        <p:spPr>
+          <a:xfrm>
+            <a:off x="838505" y="1295705"/>
+            <a:ext cx="3604565" cy="467258"/>
+          </a:xfrm>
+          <a:prstGeom prst="rect">
+            <a:avLst/>
+          </a:prstGeom>
+          <a:noFill/>
+          <a:ln/>
+        </p:spPr>
+        <p:txBody>
+          <a:bodyPr wrap="square" lIns="0" tIns="0" rIns="0" bIns="0" rtlCol="0" anchor="ctr"/>
+          <a:lstStyle/>
+          <a:p>
+            <a:pPr marL="0" indent="0" algn="l">
+              <a:buNone/>
+            </a:pPr>
+            <a:r>
+              <a:rPr lang="en-US" sz="2600" b="1" dirty="0">
+                <a:solidFill>
+                  <a:srgbClr val="FFFFFF"/>
+                </a:solidFill>
+                <a:latin typeface="Poppins" pitchFamily="34" charset="0"/>
+                <a:ea typeface="Poppins" pitchFamily="34" charset="-122"/>
+                <a:cs typeface="Poppins" pitchFamily="34" charset="-120"/>
+              </a:rPr>
+              <a:t>GitHub &amp; Video Link</a:t>
+            </a:r>
+            <a:endParaRPr lang="en-US" sz="2600" dirty="0"/>
+          </a:p>
+        </p:txBody>
+      </p:sp>
+      <p:sp>
+        <p:nvSpPr>
+          <p:cNvPr id="9" name="Shape 4"/>
+          <p:cNvSpPr/>
+          <p:nvPr/>
+        </p:nvSpPr>
+        <p:spPr>
+          <a:xfrm>
+            <a:off x="571500" y="2021738"/>
+            <a:ext cx="11048695" cy="4552798"/>
+          </a:xfrm>
+          <a:prstGeom prst="roundRect">
+            <a:avLst>
+              <a:gd name="adj" fmla="val 672"/>
+            </a:avLst>
+          </a:prstGeom>
+          <a:solidFill>
+            <a:srgbClr val="FFFFFF">
+              <a:alpha val="5000"/>
+            </a:srgbClr>
+          </a:solidFill>
+          <a:ln w="12700">
+            <a:solidFill>
+              <a:srgbClr val="88E555">
+                <a:alpha val="30000"/>
+              </a:srgbClr>
+            </a:solidFill>
+            <a:prstDash val="solid"/>
+          </a:ln>
+        </p:spPr>
+        <p:txBody>
+          <a:bodyPr/>
+          <a:lstStyle/>
+          <a:p>
+            <a:endParaRPr lang="en-IN"/>
+          </a:p>
+        </p:txBody>
+      </p:sp>
+      <p:sp>
+        <p:nvSpPr>
+          <p:cNvPr id="10" name="Shape 5"/>
+          <p:cNvSpPr/>
+          <p:nvPr/>
+        </p:nvSpPr>
+        <p:spPr>
+          <a:xfrm>
+            <a:off x="571500" y="2021738"/>
+            <a:ext cx="190195" cy="190195"/>
+          </a:xfrm>
+          <a:prstGeom prst="roundRect">
+            <a:avLst>
+              <a:gd name="adj" fmla="val 192308"/>
+            </a:avLst>
+          </a:prstGeom>
+          <a:noFill/>
+          <a:ln w="38100">
+            <a:solidFill>
+              <a:srgbClr val="88E555"/>
+            </a:solidFill>
+            <a:prstDash val="solid"/>
+          </a:ln>
+        </p:spPr>
+        <p:txBody>
+          <a:bodyPr/>
+          <a:lstStyle/>
+          <a:p>
+            <a:endParaRPr lang="en-IN"/>
+          </a:p>
+        </p:txBody>
+      </p:sp>
+      <p:sp>
+        <p:nvSpPr>
+          <p:cNvPr id="11" name="Shape 6"/>
+          <p:cNvSpPr/>
+          <p:nvPr/>
+        </p:nvSpPr>
+        <p:spPr>
+          <a:xfrm>
+            <a:off x="11430000" y="2021738"/>
+            <a:ext cx="190195" cy="190195"/>
+          </a:xfrm>
+          <a:prstGeom prst="rect">
+            <a:avLst/>
+          </a:prstGeom>
+          <a:noFill/>
+          <a:ln w="38100">
+            <a:solidFill>
+              <a:srgbClr val="88E555"/>
+            </a:solidFill>
+            <a:prstDash val="solid"/>
+          </a:ln>
+        </p:spPr>
+        <p:txBody>
+          <a:bodyPr/>
+          <a:lstStyle/>
+          <a:p>
+            <a:endParaRPr lang="en-IN"/>
+          </a:p>
+        </p:txBody>
+      </p:sp>
+      <p:sp>
+        <p:nvSpPr>
+          <p:cNvPr id="12" name="Shape 7"/>
+          <p:cNvSpPr/>
+          <p:nvPr/>
+        </p:nvSpPr>
+        <p:spPr>
+          <a:xfrm>
+            <a:off x="571500" y="6381598"/>
+            <a:ext cx="190195" cy="190195"/>
+          </a:xfrm>
+          <a:prstGeom prst="rect">
+            <a:avLst/>
+          </a:prstGeom>
+          <a:noFill/>
+          <a:ln w="38100">
+            <a:solidFill>
+              <a:srgbClr val="88E555"/>
+            </a:solidFill>
+            <a:prstDash val="solid"/>
+          </a:ln>
+        </p:spPr>
+        <p:txBody>
+          <a:bodyPr/>
+          <a:lstStyle/>
+          <a:p>
+            <a:endParaRPr lang="en-IN"/>
+          </a:p>
+        </p:txBody>
+      </p:sp>
+      <p:sp>
+        <p:nvSpPr>
+          <p:cNvPr id="13" name="Shape 8"/>
+          <p:cNvSpPr/>
+          <p:nvPr/>
+        </p:nvSpPr>
+        <p:spPr>
+          <a:xfrm>
+            <a:off x="11430000" y="6381598"/>
+            <a:ext cx="190195" cy="190195"/>
+          </a:xfrm>
+          <a:prstGeom prst="rect">
+            <a:avLst/>
+          </a:prstGeom>
+          <a:noFill/>
+          <a:ln w="38100">
+            <a:solidFill>
+              <a:srgbClr val="88E555"/>
+            </a:solidFill>
+            <a:prstDash val="solid"/>
+          </a:ln>
+        </p:spPr>
+        <p:txBody>
+          <a:bodyPr/>
+          <a:lstStyle/>
+          <a:p>
+            <a:endParaRPr lang="en-IN"/>
+          </a:p>
+        </p:txBody>
+      </p:sp>
+      <p:sp>
+        <p:nvSpPr>
+          <p:cNvPr id="14" name="Shape 9"/>
+          <p:cNvSpPr/>
+          <p:nvPr/>
+        </p:nvSpPr>
+        <p:spPr>
+          <a:xfrm>
+            <a:off x="1190549" y="2696566"/>
+            <a:ext cx="9810598" cy="1447495"/>
+          </a:xfrm>
+          <a:prstGeom prst="roundRect">
+            <a:avLst>
+              <a:gd name="adj" fmla="val 4987"/>
+            </a:avLst>
+          </a:prstGeom>
+          <a:noFill/>
+          <a:ln w="12700">
+            <a:solidFill>
+              <a:srgbClr val="88E555">
+                <a:alpha val="20000"/>
+              </a:srgbClr>
+            </a:solidFill>
+            <a:prstDash val="solid"/>
+          </a:ln>
+        </p:spPr>
+        <p:txBody>
+          <a:bodyPr/>
+          <a:lstStyle/>
+          <a:p>
+            <a:endParaRPr lang="en-IN"/>
+          </a:p>
+        </p:txBody>
+      </p:sp>
+      <p:sp>
+        <p:nvSpPr>
+          <p:cNvPr id="15" name="Shape 10"/>
+          <p:cNvSpPr/>
+          <p:nvPr/>
+        </p:nvSpPr>
+        <p:spPr>
+          <a:xfrm>
+            <a:off x="1429207" y="3087014"/>
+            <a:ext cx="666598" cy="666598"/>
+          </a:xfrm>
+          <a:prstGeom prst="ellipse">
+            <a:avLst/>
+          </a:prstGeom>
+          <a:solidFill>
+            <a:srgbClr val="273383">
+              <a:alpha val="60000"/>
+            </a:srgbClr>
+          </a:solidFill>
+          <a:ln w="25400">
+            <a:solidFill>
+              <a:srgbClr val="AEFF82"/>
+            </a:solidFill>
+            <a:prstDash val="solid"/>
+          </a:ln>
+          <a:effectLst>
+            <a:outerShdw blurRad="139700" dist="12700" dir="16200000" algn="bl" rotWithShape="0">
+              <a:srgbClr val="88E555">
+                <a:alpha val="20000"/>
+              </a:srgbClr>
+            </a:outerShdw>
+          </a:effectLst>
+        </p:spPr>
+        <p:txBody>
+          <a:bodyPr/>
+          <a:lstStyle/>
+          <a:p>
+            <a:endParaRPr lang="en-IN"/>
+          </a:p>
+        </p:txBody>
+      </p:sp>
+      <p:pic>
+        <p:nvPicPr>
+          <p:cNvPr id="16" name="Image 3" descr="preencoded.png"/>
+          <p:cNvPicPr>
+            <a:picLocks noChangeAspect="1"/>
+          </p:cNvPicPr>
+          <p:nvPr/>
+        </p:nvPicPr>
+        <p:blipFill>
+          <a:blip r:embed="rId6"/>
+          <a:srcRect l="-237" r="-237"/>
+          <a:stretch/>
+        </p:blipFill>
+        <p:spPr>
+          <a:xfrm>
+            <a:off x="1595628" y="3248863"/>
+            <a:ext cx="333756" cy="342900"/>
+          </a:xfrm>
+          <a:prstGeom prst="rect">
+            <a:avLst/>
+          </a:prstGeom>
+        </p:spPr>
+      </p:pic>
+      <p:sp>
+        <p:nvSpPr>
+          <p:cNvPr id="17" name="Text 11"/>
+          <p:cNvSpPr txBox="1"/>
+          <p:nvPr/>
+        </p:nvSpPr>
+        <p:spPr>
+          <a:xfrm>
+            <a:off x="2400300" y="2934310"/>
+            <a:ext cx="2000707" cy="267005"/>
+          </a:xfrm>
+          <a:prstGeom prst="rect">
+            <a:avLst/>
+          </a:prstGeom>
+          <a:noFill/>
+          <a:ln/>
+        </p:spPr>
+        <p:txBody>
+          <a:bodyPr wrap="square" lIns="0" tIns="0" rIns="0" bIns="0" rtlCol="0" anchor="ctr"/>
+          <a:lstStyle/>
+          <a:p>
+            <a:pPr marL="0" indent="0" algn="l">
+              <a:buNone/>
+            </a:pPr>
+            <a:r>
+              <a:rPr lang="en-US" sz="1500" b="1" dirty="0">
+                <a:solidFill>
+                  <a:srgbClr val="88E555"/>
+                </a:solidFill>
+                <a:latin typeface="Poppins" pitchFamily="34" charset="0"/>
+                <a:ea typeface="Poppins" pitchFamily="34" charset="-122"/>
+                <a:cs typeface="Poppins" pitchFamily="34" charset="-120"/>
+              </a:rPr>
+              <a:t>GitHub Repository</a:t>
+            </a:r>
+            <a:endParaRPr lang="en-US" sz="1500" dirty="0"/>
+          </a:p>
+        </p:txBody>
+      </p:sp>
+      <p:sp>
+        <p:nvSpPr>
+          <p:cNvPr id="18" name="Shape 12"/>
+          <p:cNvSpPr/>
+          <p:nvPr/>
+        </p:nvSpPr>
+        <p:spPr>
+          <a:xfrm>
+            <a:off x="2400300" y="3315614"/>
+            <a:ext cx="8363102" cy="590702"/>
+          </a:xfrm>
+          <a:prstGeom prst="roundRect">
+            <a:avLst>
+              <a:gd name="adj" fmla="val 19974"/>
+            </a:avLst>
+          </a:prstGeom>
+          <a:solidFill>
+            <a:srgbClr val="FFFFFF">
+              <a:alpha val="10000"/>
+            </a:srgbClr>
+          </a:solidFill>
+          <a:ln w="12700">
+            <a:solidFill>
+              <a:srgbClr val="4B5563"/>
+            </a:solidFill>
+            <a:prstDash val="solid"/>
+          </a:ln>
+        </p:spPr>
+        <p:txBody>
+          <a:bodyPr/>
+          <a:lstStyle/>
+          <a:p>
+            <a:endParaRPr lang="en-IN"/>
+          </a:p>
+        </p:txBody>
+      </p:sp>
+      <p:pic>
+        <p:nvPicPr>
+          <p:cNvPr id="19" name="Image 4" descr="preencoded.png"/>
+          <p:cNvPicPr>
+            <a:picLocks noChangeAspect="1"/>
+          </p:cNvPicPr>
+          <p:nvPr/>
+        </p:nvPicPr>
+        <p:blipFill>
+          <a:blip r:embed="rId7"/>
+          <a:srcRect t="-180" b="-180"/>
+          <a:stretch/>
+        </p:blipFill>
+        <p:spPr>
+          <a:xfrm>
+            <a:off x="2562149" y="3535070"/>
+            <a:ext cx="190195" cy="152705"/>
+          </a:xfrm>
+          <a:prstGeom prst="rect">
+            <a:avLst/>
+          </a:prstGeom>
+        </p:spPr>
+      </p:pic>
+      <p:sp>
+        <p:nvSpPr>
+          <p:cNvPr id="20" name="Text 13"/>
+          <p:cNvSpPr txBox="1"/>
+          <p:nvPr/>
+        </p:nvSpPr>
+        <p:spPr>
+          <a:xfrm>
+            <a:off x="2866644" y="3487522"/>
+            <a:ext cx="3891686" cy="238658"/>
+          </a:xfrm>
+          <a:prstGeom prst="rect">
+            <a:avLst/>
+          </a:prstGeom>
+          <a:noFill/>
+          <a:ln/>
+        </p:spPr>
+        <p:txBody>
+          <a:bodyPr wrap="square" lIns="0" tIns="0" rIns="0" bIns="0" rtlCol="0" anchor="ctr"/>
+          <a:lstStyle/>
+          <a:p>
+            <a:pPr marL="0" indent="0" algn="l">
+              <a:buNone/>
+            </a:pPr>
+            <a:r>
+              <a:rPr lang="en-US" sz="1300" i="1" dirty="0">
+                <a:solidFill>
+                  <a:srgbClr val="D1D5DB"/>
+                </a:solidFill>
+                <a:latin typeface="Poppins" pitchFamily="34" charset="0"/>
+                <a:ea typeface="Poppins" pitchFamily="34" charset="-122"/>
+                <a:cs typeface="Poppins" pitchFamily="34" charset="-120"/>
+              </a:rPr>
+              <a:t>github.com/prakharbajaj1551/semicon-image-restoration</a:t>
+            </a:r>
+            <a:endParaRPr lang="en-US" sz="1300" dirty="0"/>
+          </a:p>
+        </p:txBody>
+      </p:sp>
+      <p:sp>
+        <p:nvSpPr>
+          <p:cNvPr id="21" name="Shape 14"/>
+          <p:cNvSpPr/>
+          <p:nvPr/>
+        </p:nvSpPr>
+        <p:spPr>
+          <a:xfrm>
+            <a:off x="1190549" y="4449470"/>
+            <a:ext cx="9810598" cy="1447495"/>
+          </a:xfrm>
+          <a:prstGeom prst="roundRect">
+            <a:avLst>
+              <a:gd name="adj" fmla="val 4987"/>
+            </a:avLst>
+          </a:prstGeom>
+          <a:noFill/>
+          <a:ln w="12700">
+            <a:solidFill>
+              <a:srgbClr val="88E555">
+                <a:alpha val="20000"/>
+              </a:srgbClr>
+            </a:solidFill>
+            <a:prstDash val="solid"/>
+          </a:ln>
+        </p:spPr>
+        <p:txBody>
+          <a:bodyPr/>
+          <a:lstStyle/>
+          <a:p>
+            <a:endParaRPr lang="en-IN"/>
+          </a:p>
+        </p:txBody>
+      </p:sp>
+      <p:sp>
+        <p:nvSpPr>
+          <p:cNvPr id="22" name="Shape 15"/>
+          <p:cNvSpPr/>
+          <p:nvPr/>
+        </p:nvSpPr>
+        <p:spPr>
+          <a:xfrm>
+            <a:off x="1429207" y="4839919"/>
+            <a:ext cx="666598" cy="666598"/>
+          </a:xfrm>
+          <a:prstGeom prst="ellipse">
+            <a:avLst/>
+          </a:prstGeom>
+          <a:solidFill>
+            <a:srgbClr val="273383">
+              <a:alpha val="60000"/>
+            </a:srgbClr>
+          </a:solidFill>
+          <a:ln w="25400">
+            <a:solidFill>
+              <a:srgbClr val="AEFF82"/>
+            </a:solidFill>
+            <a:prstDash val="solid"/>
+          </a:ln>
+          <a:effectLst>
+            <a:outerShdw blurRad="139700" dist="12700" dir="16200000" algn="bl" rotWithShape="0">
+              <a:srgbClr val="88E555">
+                <a:alpha val="20000"/>
+              </a:srgbClr>
+            </a:outerShdw>
+          </a:effectLst>
+        </p:spPr>
+        <p:txBody>
+          <a:bodyPr/>
+          <a:lstStyle/>
+          <a:p>
+            <a:endParaRPr lang="en-IN"/>
+          </a:p>
+        </p:txBody>
+      </p:sp>
+      <p:pic>
+        <p:nvPicPr>
+          <p:cNvPr id="23" name="Image 5" descr="preencoded.png"/>
+          <p:cNvPicPr>
+            <a:picLocks noChangeAspect="1"/>
+          </p:cNvPicPr>
+          <p:nvPr/>
+        </p:nvPicPr>
+        <p:blipFill>
+          <a:blip r:embed="rId8"/>
+          <a:srcRect l="-607" r="-607"/>
+          <a:stretch/>
+        </p:blipFill>
+        <p:spPr>
+          <a:xfrm>
+            <a:off x="1567282" y="5001768"/>
+            <a:ext cx="390449" cy="342900"/>
+          </a:xfrm>
+          <a:prstGeom prst="rect">
+            <a:avLst/>
+          </a:prstGeom>
+        </p:spPr>
+      </p:pic>
+      <p:sp>
+        <p:nvSpPr>
+          <p:cNvPr id="24" name="Text 16"/>
+          <p:cNvSpPr txBox="1"/>
+          <p:nvPr/>
+        </p:nvSpPr>
+        <p:spPr>
+          <a:xfrm>
+            <a:off x="2400300" y="4687214"/>
+            <a:ext cx="3086100" cy="267005"/>
+          </a:xfrm>
+          <a:prstGeom prst="rect">
+            <a:avLst/>
+          </a:prstGeom>
+          <a:noFill/>
+          <a:ln/>
+        </p:spPr>
+        <p:txBody>
+          <a:bodyPr wrap="square" lIns="0" tIns="0" rIns="0" bIns="0" rtlCol="0" anchor="ctr"/>
+          <a:lstStyle/>
+          <a:p>
+            <a:pPr marL="0" indent="0" algn="l">
+              <a:buNone/>
+            </a:pPr>
+            <a:r>
+              <a:rPr lang="en-US" sz="1500" b="1" dirty="0">
+                <a:solidFill>
+                  <a:srgbClr val="88E555"/>
+                </a:solidFill>
+                <a:latin typeface="Poppins" pitchFamily="34" charset="0"/>
+                <a:ea typeface="Poppins" pitchFamily="34" charset="-122"/>
+                <a:cs typeface="Poppins" pitchFamily="34" charset="-120"/>
+              </a:rPr>
+              <a:t>Prototype / Simulation Video</a:t>
+            </a:r>
+            <a:endParaRPr lang="en-US" sz="1500" dirty="0"/>
+          </a:p>
+        </p:txBody>
+      </p:sp>
+      <p:sp>
+        <p:nvSpPr>
+          <p:cNvPr id="25" name="Shape 17"/>
+          <p:cNvSpPr/>
+          <p:nvPr/>
+        </p:nvSpPr>
+        <p:spPr>
+          <a:xfrm>
+            <a:off x="2400300" y="5068519"/>
+            <a:ext cx="8363102" cy="590702"/>
+          </a:xfrm>
+          <a:prstGeom prst="roundRect">
+            <a:avLst>
+              <a:gd name="adj" fmla="val 19974"/>
+            </a:avLst>
+          </a:prstGeom>
+          <a:solidFill>
+            <a:srgbClr val="FFFFFF">
+              <a:alpha val="10000"/>
+            </a:srgbClr>
+          </a:solidFill>
+          <a:ln w="12700">
+            <a:solidFill>
+              <a:srgbClr val="4B5563"/>
+            </a:solidFill>
+            <a:prstDash val="solid"/>
+          </a:ln>
+        </p:spPr>
+        <p:txBody>
+          <a:bodyPr/>
+          <a:lstStyle/>
+          <a:p>
+            <a:endParaRPr lang="en-IN"/>
+          </a:p>
+        </p:txBody>
+      </p:sp>
+      <p:pic>
+        <p:nvPicPr>
+          <p:cNvPr id="26" name="Image 6" descr="preencoded.png"/>
+          <p:cNvPicPr>
+            <a:picLocks noChangeAspect="1"/>
+          </p:cNvPicPr>
+          <p:nvPr/>
+        </p:nvPicPr>
+        <p:blipFill>
+          <a:blip r:embed="rId9"/>
+          <a:srcRect l="-33" r="-33"/>
+          <a:stretch/>
+        </p:blipFill>
+        <p:spPr>
+          <a:xfrm>
+            <a:off x="2562149" y="5287061"/>
+            <a:ext cx="171907" cy="152705"/>
+          </a:xfrm>
+          <a:prstGeom prst="rect">
+            <a:avLst/>
+          </a:prstGeom>
+        </p:spPr>
+      </p:pic>
+      <p:pic>
+        <p:nvPicPr>
+          <p:cNvPr id="28" name="Picture 27">
+            <a:extLst>
+              <a:ext uri="{FF2B5EF4-FFF2-40B4-BE49-F238E27FC236}">
+                <a16:creationId xmlns:a16="http://schemas.microsoft.com/office/drawing/2014/main" xmlns="" id="{DAC5205F-3589-4B54-7039-C1C70523478B}"/>
+              </a:ext>
+            </a:extLst>
+          </p:cNvPr>
+          <p:cNvPicPr>
+            <a:picLocks noChangeAspect="1"/>
+          </p:cNvPicPr>
+          <p:nvPr/>
+        </p:nvPicPr>
+        <p:blipFill>
+          <a:blip r:embed="rId10"/>
+          <a:stretch>
+            <a:fillRect/>
+          </a:stretch>
+        </p:blipFill>
+        <p:spPr>
+          <a:xfrm>
+            <a:off x="5292164" y="227710"/>
+            <a:ext cx="1607366" cy="783591"/>
+          </a:xfrm>
+          <a:prstGeom prst="rect">
+            <a:avLst/>
+          </a:prstGeom>
+        </p:spPr>
+      </p:pic>
+      <p:sp>
+        <p:nvSpPr>
+          <p:cNvPr id="30" name="Shape 1">
+            <a:extLst>
+              <a:ext uri="{FF2B5EF4-FFF2-40B4-BE49-F238E27FC236}">
+                <a16:creationId xmlns:a16="http://schemas.microsoft.com/office/drawing/2014/main" xmlns="" id="{89A93441-4E5C-0FCA-6BDD-16AB2E1B711C}"/>
+              </a:ext>
+            </a:extLst>
+          </p:cNvPr>
+          <p:cNvSpPr/>
+          <p:nvPr/>
+        </p:nvSpPr>
+        <p:spPr>
+          <a:xfrm>
+            <a:off x="571500" y="167944"/>
+            <a:ext cx="11048695" cy="857707"/>
+          </a:xfrm>
+          <a:prstGeom prst="roundRect">
+            <a:avLst>
+              <a:gd name="adj" fmla="val 9476"/>
+            </a:avLst>
+          </a:prstGeom>
+          <a:solidFill>
+            <a:srgbClr val="FFFFFF">
+              <a:alpha val="95000"/>
+            </a:srgbClr>
+          </a:solidFill>
+          <a:ln/>
+          <a:effectLst>
+            <a:outerShdw blurRad="63500" dist="38100" dir="5400000" algn="bl" rotWithShape="0">
+              <a:srgbClr val="000000">
+                <a:alpha val="10000"/>
+              </a:srgbClr>
+            </a:outerShdw>
+          </a:effectLst>
+        </p:spPr>
+        <p:txBody>
+          <a:bodyPr/>
+          <a:lstStyle/>
+          <a:p>
+            <a:endParaRPr lang="en-IN"/>
+          </a:p>
+        </p:txBody>
+      </p:sp>
+      <p:pic>
+        <p:nvPicPr>
+          <p:cNvPr id="31" name="Picture 30">
+            <a:extLst>
+              <a:ext uri="{FF2B5EF4-FFF2-40B4-BE49-F238E27FC236}">
+                <a16:creationId xmlns:a16="http://schemas.microsoft.com/office/drawing/2014/main" xmlns="" id="{73E0C32B-9271-FA34-86BB-7D95EB5AB342}"/>
+              </a:ext>
+            </a:extLst>
+          </p:cNvPr>
+          <p:cNvPicPr>
+            <a:picLocks noChangeAspect="1"/>
+          </p:cNvPicPr>
+          <p:nvPr/>
+        </p:nvPicPr>
+        <p:blipFill>
+          <a:blip r:embed="rId11">
+            <a:extLst>
+              <a:ext uri="{28A0092B-C50C-407E-A947-70E740481C1C}">
+                <a14:useLocalDpi xmlns:a14="http://schemas.microsoft.com/office/drawing/2010/main" val="0"/>
+              </a:ext>
+            </a:extLst>
+          </a:blip>
+          <a:stretch>
+            <a:fillRect/>
+          </a:stretch>
+        </p:blipFill>
+        <p:spPr>
+          <a:xfrm>
+            <a:off x="1514101" y="297181"/>
             <a:ext cx="9163491" cy="586435"/>
           </a:xfrm>
           <a:prstGeom prst="rect">
@@ -12267,7 +11258,7 @@
         </p:nvSpPr>
         <p:spPr>
           <a:xfrm>
-            <a:off x="571500" y="1333195"/>
+            <a:off x="571500" y="1190549"/>
             <a:ext cx="75895" cy="409651"/>
           </a:xfrm>
           <a:prstGeom prst="rect">
@@ -12294,8 +11285,8 @@
         </p:nvSpPr>
         <p:spPr>
           <a:xfrm>
-            <a:off x="838505" y="1295705"/>
-            <a:ext cx="3604565" cy="467258"/>
+            <a:off x="838505" y="1152144"/>
+            <a:ext cx="4624121" cy="467258"/>
           </a:xfrm>
           <a:prstGeom prst="rect">
             <a:avLst/>
@@ -12319,7 +11310,7 @@
                 <a:ea typeface="Poppins" pitchFamily="34" charset="-122"/>
                 <a:cs typeface="Poppins" pitchFamily="34" charset="-120"/>
               </a:rPr>
-              <a:t>GitHub &amp; Video Link</a:t>
+              <a:t>Research and References</a:t>
             </a:r>
             <a:endParaRPr lang="en-US" sz="2600" dirty="0"/>
           </a:p>
@@ -12333,12 +11324,12 @@
         </p:nvSpPr>
         <p:spPr>
           <a:xfrm>
-            <a:off x="571500" y="2021738"/>
-            <a:ext cx="11048695" cy="4552798"/>
+            <a:off x="571500" y="1830629"/>
+            <a:ext cx="11048695" cy="4743907"/>
           </a:xfrm>
           <a:prstGeom prst="roundRect">
             <a:avLst>
-              <a:gd name="adj" fmla="val 672"/>
+              <a:gd name="adj" fmla="val 619"/>
             </a:avLst>
           </a:prstGeom>
           <a:solidFill>
@@ -12371,7 +11362,7 @@
         </p:nvSpPr>
         <p:spPr>
           <a:xfrm>
-            <a:off x="571500" y="2021738"/>
+            <a:off x="571500" y="1830629"/>
             <a:ext cx="190195" cy="190195"/>
           </a:xfrm>
           <a:prstGeom prst="roundRect">
@@ -12403,7 +11394,7 @@
         </p:nvSpPr>
         <p:spPr>
           <a:xfrm>
-            <a:off x="11430000" y="2021738"/>
+            <a:off x="11430000" y="1830629"/>
             <a:ext cx="190195" cy="190195"/>
           </a:xfrm>
           <a:prstGeom prst="rect">
@@ -12493,49 +11484,15 @@
         </p:nvSpPr>
         <p:spPr>
           <a:xfrm>
-            <a:off x="1190549" y="2696566"/>
-            <a:ext cx="9810598" cy="1447495"/>
-          </a:xfrm>
-          <a:prstGeom prst="roundRect">
-            <a:avLst>
-              <a:gd name="adj" fmla="val 4987"/>
-            </a:avLst>
-          </a:prstGeom>
-          <a:noFill/>
-          <a:ln w="12700">
-            <a:solidFill>
-              <a:srgbClr val="88E555">
-                <a:alpha val="20000"/>
-              </a:srgbClr>
-            </a:solidFill>
-            <a:prstDash val="solid"/>
-          </a:ln>
-        </p:spPr>
-        <p:txBody>
-          <a:bodyPr/>
-          <a:lstStyle/>
-          <a:p>
-            <a:endParaRPr lang="en-IN"/>
-          </a:p>
-        </p:txBody>
-      </p:sp>
-      <p:sp>
-        <p:nvSpPr>
-          <p:cNvPr id="15" name="Shape 10"/>
-          <p:cNvSpPr/>
-          <p:nvPr/>
-        </p:nvSpPr>
-        <p:spPr>
-          <a:xfrm>
-            <a:off x="1429207" y="3087014"/>
-            <a:ext cx="666598" cy="666598"/>
+            <a:off x="961949" y="2173529"/>
+            <a:ext cx="476402" cy="476402"/>
           </a:xfrm>
           <a:prstGeom prst="ellipse">
             <a:avLst/>
           </a:prstGeom>
           <a:solidFill>
             <a:srgbClr val="273383">
-              <a:alpha val="60000"/>
+              <a:alpha val="50000"/>
             </a:srgbClr>
           </a:solidFill>
           <a:ln w="25400">
@@ -12544,13 +11501,6 @@
             </a:solidFill>
             <a:prstDash val="solid"/>
           </a:ln>
-          <a:effectLst>
-            <a:outerShdw blurRad="139700" dist="12700" dir="16200000" algn="bl" rotWithShape="0">
-              <a:srgbClr val="88E555">
-                <a:alpha val="20000"/>
-              </a:srgbClr>
-            </a:outerShdw>
-          </a:effectLst>
         </p:spPr>
         <p:txBody>
           <a:bodyPr/>
@@ -12562,7 +11512,7 @@
       </p:sp>
       <p:pic>
         <p:nvPicPr>
-          <p:cNvPr id="16" name="Image 3" descr="preencoded.png"/>
+          <p:cNvPr id="15" name="Image 3" descr="preencoded.png"/>
           <p:cNvPicPr>
             <a:picLocks noChangeAspect="1"/>
           </p:cNvPicPr>
@@ -12570,13 +11520,13 @@
         </p:nvPicPr>
         <p:blipFill>
           <a:blip r:embed="rId6"/>
-          <a:srcRect l="-237" r="-237"/>
+          <a:srcRect/>
           <a:stretch/>
         </p:blipFill>
         <p:spPr>
           <a:xfrm>
-            <a:off x="1595628" y="3248863"/>
-            <a:ext cx="333756" cy="342900"/>
+            <a:off x="1086307" y="2297887"/>
+            <a:ext cx="228600" cy="228600"/>
           </a:xfrm>
           <a:prstGeom prst="rect">
             <a:avLst/>
@@ -12585,14 +11535,14 @@
       </p:pic>
       <p:sp>
         <p:nvSpPr>
-          <p:cNvPr id="17" name="Text 11"/>
+          <p:cNvPr id="16" name="Text 10"/>
           <p:cNvSpPr txBox="1"/>
           <p:nvPr/>
         </p:nvSpPr>
         <p:spPr>
           <a:xfrm>
-            <a:off x="2400300" y="2934310"/>
-            <a:ext cx="2000707" cy="267005"/>
+            <a:off x="1628546" y="2173529"/>
+            <a:ext cx="3810305" cy="267005"/>
           </a:xfrm>
           <a:prstGeom prst="rect">
             <a:avLst/>
@@ -12616,7 +11566,7 @@
                 <a:ea typeface="Poppins" pitchFamily="34" charset="-122"/>
                 <a:cs typeface="Poppins" pitchFamily="34" charset="-120"/>
               </a:rPr>
-              <a:t>GitHub Repository</a:t>
+              <a:t>Research Background &amp; Methodology</a:t>
             </a:r>
             <a:endParaRPr lang="en-US" sz="1500" dirty="0"/>
           </a:p>
@@ -12624,73 +11574,14 @@
       </p:sp>
       <p:sp>
         <p:nvSpPr>
-          <p:cNvPr id="18" name="Shape 12"/>
-          <p:cNvSpPr/>
-          <p:nvPr/>
-        </p:nvSpPr>
-        <p:spPr>
-          <a:xfrm>
-            <a:off x="2400300" y="3315614"/>
-            <a:ext cx="8363102" cy="590702"/>
-          </a:xfrm>
-          <a:prstGeom prst="roundRect">
-            <a:avLst>
-              <a:gd name="adj" fmla="val 19974"/>
-            </a:avLst>
-          </a:prstGeom>
-          <a:solidFill>
-            <a:srgbClr val="FFFFFF">
-              <a:alpha val="10000"/>
-            </a:srgbClr>
-          </a:solidFill>
-          <a:ln w="12700">
-            <a:solidFill>
-              <a:srgbClr val="4B5563"/>
-            </a:solidFill>
-            <a:prstDash val="solid"/>
-          </a:ln>
-        </p:spPr>
-        <p:txBody>
-          <a:bodyPr/>
-          <a:lstStyle/>
-          <a:p>
-            <a:endParaRPr lang="en-IN"/>
-          </a:p>
-        </p:txBody>
-      </p:sp>
-      <p:pic>
-        <p:nvPicPr>
-          <p:cNvPr id="19" name="Image 4" descr="preencoded.png"/>
-          <p:cNvPicPr>
-            <a:picLocks noChangeAspect="1"/>
-          </p:cNvPicPr>
-          <p:nvPr/>
-        </p:nvPicPr>
-        <p:blipFill>
-          <a:blip r:embed="rId7"/>
-          <a:srcRect t="-180" b="-180"/>
-          <a:stretch/>
-        </p:blipFill>
-        <p:spPr>
-          <a:xfrm>
-            <a:off x="2562149" y="3535070"/>
-            <a:ext cx="190195" cy="152705"/>
-          </a:xfrm>
-          <a:prstGeom prst="rect">
-            <a:avLst/>
-          </a:prstGeom>
-        </p:spPr>
-      </p:pic>
-      <p:sp>
-        <p:nvSpPr>
-          <p:cNvPr id="20" name="Text 13"/>
+          <p:cNvPr id="17" name="Text 11"/>
           <p:cNvSpPr txBox="1"/>
           <p:nvPr/>
         </p:nvSpPr>
         <p:spPr>
           <a:xfrm>
-            <a:off x="2866644" y="3487522"/>
-            <a:ext cx="3891686" cy="238658"/>
+            <a:off x="1628546" y="2516429"/>
+            <a:ext cx="5701284" cy="191110"/>
           </a:xfrm>
           <a:prstGeom prst="rect">
             <a:avLst/>
@@ -12706,7 +11597,7 @@
               <a:buNone/>
             </a:pPr>
             <a:r>
-              <a:rPr lang="en-US" sz="1300" i="1" dirty="0">
+              <a:rPr lang="en-US" sz="1000" dirty="0">
                 <a:solidFill>
                   <a:srgbClr val="D1D5DB"/>
                 </a:solidFill>
@@ -12714,34 +11605,36 @@
                 <a:ea typeface="Poppins" pitchFamily="34" charset="-122"/>
                 <a:cs typeface="Poppins" pitchFamily="34" charset="-120"/>
               </a:rPr>
-              <a:t>github.com/prakharbajaj1551/semicon-image-restoration</a:t>
+              <a:t>Every component is drawn from peer-reviewed restoration research, not invented for this hackathon.</a:t>
             </a:r>
-            <a:endParaRPr lang="en-US" sz="1300" dirty="0"/>
-          </a:p>
-        </p:txBody>
-      </p:sp>
-      <p:sp>
-        <p:nvSpPr>
-          <p:cNvPr id="21" name="Shape 14"/>
-          <p:cNvSpPr/>
-          <p:nvPr/>
-        </p:nvSpPr>
-        <p:spPr>
-          <a:xfrm>
-            <a:off x="1190549" y="4449470"/>
-            <a:ext cx="9810598" cy="1447495"/>
+            <a:endParaRPr lang="en-US" sz="1000" dirty="0"/>
+          </a:p>
+        </p:txBody>
+      </p:sp>
+      <p:sp>
+        <p:nvSpPr>
+          <p:cNvPr id="18" name="Shape 12"/>
+          <p:cNvSpPr/>
+          <p:nvPr/>
+        </p:nvSpPr>
+        <p:spPr>
+          <a:xfrm>
+            <a:off x="1628546" y="2783434"/>
+            <a:ext cx="9601200" cy="1188720"/>
           </a:xfrm>
           <a:prstGeom prst="roundRect">
             <a:avLst>
-              <a:gd name="adj" fmla="val 4987"/>
+              <a:gd name="adj" fmla="val 6121"/>
             </a:avLst>
           </a:prstGeom>
-          <a:noFill/>
+          <a:solidFill>
+            <a:srgbClr val="1E3A8A">
+              <a:alpha val="40000"/>
+            </a:srgbClr>
+          </a:solidFill>
           <a:ln w="12700">
             <a:solidFill>
-              <a:srgbClr val="88E555">
-                <a:alpha val="20000"/>
-              </a:srgbClr>
+              <a:srgbClr val="1D4ED8"/>
             </a:solidFill>
             <a:prstDash val="solid"/>
           </a:ln>
@@ -12756,21 +11649,100 @@
       </p:sp>
       <p:sp>
         <p:nvSpPr>
-          <p:cNvPr id="22" name="Shape 15"/>
-          <p:cNvSpPr/>
-          <p:nvPr/>
-        </p:nvSpPr>
-        <p:spPr>
-          <a:xfrm>
-            <a:off x="1429207" y="4839919"/>
-            <a:ext cx="666598" cy="666598"/>
+          <p:cNvPr id="19" name="Text 13"/>
+          <p:cNvSpPr txBox="1"/>
+          <p:nvPr/>
+        </p:nvSpPr>
+        <p:spPr>
+          <a:xfrm>
+            <a:off x="1790395" y="2945282"/>
+            <a:ext cx="5544007" cy="868680"/>
+          </a:xfrm>
+          <a:prstGeom prst="rect">
+            <a:avLst/>
+          </a:prstGeom>
+          <a:noFill/>
+          <a:ln/>
+        </p:spPr>
+        <p:txBody>
+          <a:bodyPr wrap="square" lIns="0" tIns="0" rIns="0" bIns="0" rtlCol="0" anchor="t"/>
+          <a:lstStyle/>
+          <a:p>
+            <a:pPr marL="0" indent="0" algn="l">
+              <a:buNone/>
+            </a:pPr>
+            <a:r>
+              <a:rPr lang="en-US" sz="1000" i="1" dirty="0">
+                <a:solidFill>
+                  <a:srgbClr val="FFFFFF">
+                    <a:alpha val="70000"/>
+                  </a:srgbClr>
+                </a:solidFill>
+                <a:latin typeface="Poppins" pitchFamily="34" charset="0"/>
+                <a:ea typeface="Poppins" pitchFamily="34" charset="-122"/>
+                <a:cs typeface="Poppins" pitchFamily="34" charset="-120"/>
+              </a:rPr>
+              <a:t>Built on published, peer-reviewed research rather than an unproven design: NAFNet (ECCV 2022) matches transformer restorers at a fraction of the cost.</a:t>
+            </a:r>
+            <a:endParaRPr lang="en-US" sz="1200" dirty="0"/>
+          </a:p>
+          <a:p>
+            <a:pPr marL="0" indent="0" algn="l">
+              <a:buNone/>
+            </a:pPr>
+            <a:r>
+              <a:rPr lang="en-US" sz="1000" i="1" dirty="0">
+                <a:solidFill>
+                  <a:srgbClr val="FFFFFF">
+                    <a:alpha val="70000"/>
+                  </a:srgbClr>
+                </a:solidFill>
+                <a:latin typeface="Poppins" pitchFamily="34" charset="0"/>
+                <a:ea typeface="Poppins" pitchFamily="34" charset="-122"/>
+                <a:cs typeface="Poppins" pitchFamily="34" charset="-120"/>
+              </a:rPr>
+              <a:t>Loss follows restoration literature - Charbonnier for pixel fidelity, SSIM for structure, LPIPS for perceptual quality.</a:t>
+            </a:r>
+            <a:endParaRPr lang="en-US" sz="1200" dirty="0"/>
+          </a:p>
+          <a:p>
+            <a:pPr marL="0" indent="0" algn="l">
+              <a:buNone/>
+            </a:pPr>
+            <a:r>
+              <a:rPr lang="en-US" sz="1000" i="1" dirty="0">
+                <a:solidFill>
+                  <a:srgbClr val="FFFFFF">
+                    <a:alpha val="70000"/>
+                  </a:srgbClr>
+                </a:solidFill>
+                <a:latin typeface="Poppins" pitchFamily="34" charset="0"/>
+                <a:ea typeface="Poppins" pitchFamily="34" charset="-122"/>
+                <a:cs typeface="Poppins" pitchFamily="34" charset="-120"/>
+              </a:rPr>
+              <a:t>Validated on a held-out split with no selection leakage, against a bicubic baseline, with failure cases analysed.</a:t>
+            </a:r>
+            <a:endParaRPr lang="en-US" sz="1200" dirty="0"/>
+          </a:p>
+        </p:txBody>
+      </p:sp>
+      <p:sp>
+        <p:nvSpPr>
+          <p:cNvPr id="20" name="Shape 14"/>
+          <p:cNvSpPr/>
+          <p:nvPr/>
+        </p:nvSpPr>
+        <p:spPr>
+          <a:xfrm>
+            <a:off x="961949" y="4155034"/>
+            <a:ext cx="476402" cy="476402"/>
           </a:xfrm>
           <a:prstGeom prst="ellipse">
             <a:avLst/>
           </a:prstGeom>
           <a:solidFill>
             <a:srgbClr val="273383">
-              <a:alpha val="60000"/>
+              <a:alpha val="50000"/>
             </a:srgbClr>
           </a:solidFill>
           <a:ln w="25400">
@@ -12779,13 +11751,6 @@
             </a:solidFill>
             <a:prstDash val="solid"/>
           </a:ln>
-          <a:effectLst>
-            <a:outerShdw blurRad="139700" dist="12700" dir="16200000" algn="bl" rotWithShape="0">
-              <a:srgbClr val="88E555">
-                <a:alpha val="20000"/>
-              </a:srgbClr>
-            </a:outerShdw>
-          </a:effectLst>
         </p:spPr>
         <p:txBody>
           <a:bodyPr/>
@@ -12797,21 +11762,21 @@
       </p:sp>
       <p:pic>
         <p:nvPicPr>
-          <p:cNvPr id="23" name="Image 5" descr="preencoded.png"/>
+          <p:cNvPr id="21" name="Image 4" descr="preencoded.png"/>
           <p:cNvPicPr>
             <a:picLocks noChangeAspect="1"/>
           </p:cNvPicPr>
           <p:nvPr/>
         </p:nvPicPr>
         <p:blipFill>
-          <a:blip r:embed="rId8"/>
-          <a:srcRect l="-607" r="-607"/>
+          <a:blip r:embed="rId7"/>
+          <a:srcRect l="-80" r="-80"/>
           <a:stretch/>
         </p:blipFill>
         <p:spPr>
           <a:xfrm>
-            <a:off x="1567282" y="5001768"/>
-            <a:ext cx="390449" cy="342900"/>
+            <a:off x="1057046" y="4279392"/>
+            <a:ext cx="286207" cy="228600"/>
           </a:xfrm>
           <a:prstGeom prst="rect">
             <a:avLst/>
@@ -12820,14 +11785,14 @@
       </p:pic>
       <p:sp>
         <p:nvSpPr>
-          <p:cNvPr id="24" name="Text 16"/>
+          <p:cNvPr id="22" name="Text 15"/>
           <p:cNvSpPr txBox="1"/>
           <p:nvPr/>
         </p:nvSpPr>
         <p:spPr>
           <a:xfrm>
-            <a:off x="2400300" y="4687214"/>
-            <a:ext cx="3086100" cy="267005"/>
+            <a:off x="1628546" y="4155034"/>
+            <a:ext cx="2343607" cy="267005"/>
           </a:xfrm>
           <a:prstGeom prst="rect">
             <a:avLst/>
@@ -12851,7 +11816,7 @@
                 <a:ea typeface="Poppins" pitchFamily="34" charset="-122"/>
                 <a:cs typeface="Poppins" pitchFamily="34" charset="-120"/>
               </a:rPr>
-              <a:t>Prototype / Simulation Video</a:t>
+              <a:t>References &amp; Citations</a:t>
             </a:r>
             <a:endParaRPr lang="en-US" sz="1500" dirty="0"/>
           </a:p>
@@ -12859,73 +11824,14 @@
       </p:sp>
       <p:sp>
         <p:nvSpPr>
-          <p:cNvPr id="25" name="Shape 17"/>
-          <p:cNvSpPr/>
-          <p:nvPr/>
-        </p:nvSpPr>
-        <p:spPr>
-          <a:xfrm>
-            <a:off x="2400300" y="5068519"/>
-            <a:ext cx="8363102" cy="590702"/>
-          </a:xfrm>
-          <a:prstGeom prst="roundRect">
-            <a:avLst>
-              <a:gd name="adj" fmla="val 19974"/>
-            </a:avLst>
-          </a:prstGeom>
-          <a:solidFill>
-            <a:srgbClr val="FFFFFF">
-              <a:alpha val="10000"/>
-            </a:srgbClr>
-          </a:solidFill>
-          <a:ln w="12700">
-            <a:solidFill>
-              <a:srgbClr val="4B5563"/>
-            </a:solidFill>
-            <a:prstDash val="solid"/>
-          </a:ln>
-        </p:spPr>
-        <p:txBody>
-          <a:bodyPr/>
-          <a:lstStyle/>
-          <a:p>
-            <a:endParaRPr lang="en-IN"/>
-          </a:p>
-        </p:txBody>
-      </p:sp>
-      <p:pic>
-        <p:nvPicPr>
-          <p:cNvPr id="26" name="Image 6" descr="preencoded.png"/>
-          <p:cNvPicPr>
-            <a:picLocks noChangeAspect="1"/>
-          </p:cNvPicPr>
-          <p:nvPr/>
-        </p:nvPicPr>
-        <p:blipFill>
-          <a:blip r:embed="rId9"/>
-          <a:srcRect l="-33" r="-33"/>
-          <a:stretch/>
-        </p:blipFill>
-        <p:spPr>
-          <a:xfrm>
-            <a:off x="2562149" y="5287061"/>
-            <a:ext cx="171907" cy="152705"/>
-          </a:xfrm>
-          <a:prstGeom prst="rect">
-            <a:avLst/>
-          </a:prstGeom>
-        </p:spPr>
-      </p:pic>
-      <p:sp>
-        <p:nvSpPr>
-          <p:cNvPr id="27" name="Text 18"/>
+          <p:cNvPr id="23" name="Text 16"/>
           <p:cNvSpPr txBox="1"/>
           <p:nvPr/>
         </p:nvSpPr>
         <p:spPr>
           <a:xfrm>
-            <a:off x="2848356" y="5239512"/>
-            <a:ext cx="6053328" cy="238658"/>
+            <a:off x="1628546" y="4497934"/>
+            <a:ext cx="2767889" cy="191110"/>
           </a:xfrm>
           <a:prstGeom prst="rect">
             <a:avLst/>
@@ -12941,7 +11847,7 @@
               <a:buNone/>
             </a:pPr>
             <a:r>
-              <a:rPr lang="en-US" sz="1300" i="1" dirty="0">
+              <a:rPr lang="en-US" sz="1000" dirty="0">
                 <a:solidFill>
                   <a:srgbClr val="D1D5DB"/>
                 </a:solidFill>
@@ -12949,18 +11855,235 @@
                 <a:ea typeface="Poppins" pitchFamily="34" charset="-122"/>
                 <a:cs typeface="Poppins" pitchFamily="34" charset="-120"/>
               </a:rPr>
-              <a:t>https://www.youtube.com/watch?v=RMSDaviTOIw</a:t>
+              <a:t>The three papers behind our architecture, our upsampler and our perceptual metric.</a:t>
             </a:r>
-            <a:endParaRPr lang="en-US" sz="1300" dirty="0"/>
+            <a:endParaRPr lang="en-US" sz="1000" dirty="0"/>
+          </a:p>
+        </p:txBody>
+      </p:sp>
+      <p:sp>
+        <p:nvSpPr>
+          <p:cNvPr id="24" name="Shape 17"/>
+          <p:cNvSpPr/>
+          <p:nvPr/>
+        </p:nvSpPr>
+        <p:spPr>
+          <a:xfrm>
+            <a:off x="1628546" y="4764938"/>
+            <a:ext cx="9601200" cy="1410005"/>
+          </a:xfrm>
+          <a:prstGeom prst="roundRect">
+            <a:avLst>
+              <a:gd name="adj" fmla="val 3505"/>
+            </a:avLst>
+          </a:prstGeom>
+          <a:solidFill>
+            <a:srgbClr val="1E3A8A">
+              <a:alpha val="40000"/>
+            </a:srgbClr>
+          </a:solidFill>
+          <a:ln w="12700">
+            <a:solidFill>
+              <a:srgbClr val="1D4ED8"/>
+            </a:solidFill>
+            <a:prstDash val="solid"/>
+          </a:ln>
+        </p:spPr>
+        <p:txBody>
+          <a:bodyPr/>
+          <a:lstStyle/>
+          <a:p>
+            <a:endParaRPr lang="en-IN"/>
+          </a:p>
+        </p:txBody>
+      </p:sp>
+      <p:sp>
+        <p:nvSpPr>
+          <p:cNvPr id="25" name="Shape 18"/>
+          <p:cNvSpPr/>
+          <p:nvPr/>
+        </p:nvSpPr>
+        <p:spPr>
+          <a:xfrm>
+            <a:off x="1790395" y="5232197"/>
+            <a:ext cx="9277502" cy="9144"/>
+          </a:xfrm>
+          <a:prstGeom prst="rect">
+            <a:avLst/>
+          </a:prstGeom>
+          <a:solidFill>
+            <a:srgbClr val="1E40AF">
+              <a:alpha val="30000"/>
+            </a:srgbClr>
+          </a:solidFill>
+          <a:ln/>
+        </p:spPr>
+        <p:txBody>
+          <a:bodyPr/>
+          <a:lstStyle/>
+          <a:p>
+            <a:endParaRPr lang="en-IN"/>
+          </a:p>
+        </p:txBody>
+      </p:sp>
+      <p:sp>
+        <p:nvSpPr>
+          <p:cNvPr id="26" name="Text 19"/>
+          <p:cNvSpPr txBox="1"/>
+          <p:nvPr/>
+        </p:nvSpPr>
+        <p:spPr>
+          <a:xfrm>
+            <a:off x="1792224" y="4846320"/>
+            <a:ext cx="9235440" cy="365760"/>
+          </a:xfrm>
+          <a:prstGeom prst="rect">
+            <a:avLst/>
+          </a:prstGeom>
+          <a:noFill/>
+          <a:ln/>
+        </p:spPr>
+        <p:txBody>
+          <a:bodyPr wrap="square" lIns="0" tIns="0" rIns="0" bIns="0" rtlCol="0" anchor="t"/>
+          <a:lstStyle/>
+          <a:p>
+            <a:pPr marL="0" indent="0" algn="l">
+              <a:buNone/>
+            </a:pPr>
+            <a:r>
+              <a:rPr lang="en-US" sz="1000" dirty="0">
+                <a:solidFill>
+                  <a:srgbClr val="FFFFFF">
+                    <a:alpha val="80000"/>
+                  </a:srgbClr>
+                </a:solidFill>
+                <a:latin typeface="Poppins" pitchFamily="34" charset="0"/>
+                <a:ea typeface="Poppins" pitchFamily="34" charset="-122"/>
+                <a:cs typeface="Poppins" pitchFamily="34" charset="-120"/>
+              </a:rPr>
+              <a:t>Ref 1: Chen et al., Simple Baselines for Image Restoration (NAFNet), ECCV 2022 - arxiv.org/abs/2204.04676</a:t>
+            </a:r>
+            <a:endParaRPr lang="en-US" sz="1200" dirty="0"/>
+          </a:p>
+        </p:txBody>
+      </p:sp>
+      <p:sp>
+        <p:nvSpPr>
+          <p:cNvPr id="27" name="Shape 20"/>
+          <p:cNvSpPr/>
+          <p:nvPr/>
+        </p:nvSpPr>
+        <p:spPr>
+          <a:xfrm>
+            <a:off x="1790395" y="5661050"/>
+            <a:ext cx="9277502" cy="9144"/>
+          </a:xfrm>
+          <a:prstGeom prst="rect">
+            <a:avLst/>
+          </a:prstGeom>
+          <a:solidFill>
+            <a:srgbClr val="1E40AF">
+              <a:alpha val="30000"/>
+            </a:srgbClr>
+          </a:solidFill>
+          <a:ln/>
+        </p:spPr>
+        <p:txBody>
+          <a:bodyPr/>
+          <a:lstStyle/>
+          <a:p>
+            <a:endParaRPr lang="en-IN"/>
+          </a:p>
+        </p:txBody>
+      </p:sp>
+      <p:sp>
+        <p:nvSpPr>
+          <p:cNvPr id="28" name="Text 21"/>
+          <p:cNvSpPr txBox="1"/>
+          <p:nvPr/>
+        </p:nvSpPr>
+        <p:spPr>
+          <a:xfrm>
+            <a:off x="1792224" y="5303520"/>
+            <a:ext cx="9235440" cy="365760"/>
+          </a:xfrm>
+          <a:prstGeom prst="rect">
+            <a:avLst/>
+          </a:prstGeom>
+          <a:noFill/>
+          <a:ln/>
+        </p:spPr>
+        <p:txBody>
+          <a:bodyPr wrap="square" lIns="0" tIns="0" rIns="0" bIns="0" rtlCol="0" anchor="t"/>
+          <a:lstStyle/>
+          <a:p>
+            <a:pPr marL="0" indent="0" algn="l">
+              <a:buNone/>
+            </a:pPr>
+            <a:r>
+              <a:rPr lang="en-US" sz="1000" dirty="0">
+                <a:solidFill>
+                  <a:srgbClr val="FFFFFF">
+                    <a:alpha val="80000"/>
+                  </a:srgbClr>
+                </a:solidFill>
+                <a:latin typeface="Poppins" pitchFamily="34" charset="0"/>
+                <a:ea typeface="Poppins" pitchFamily="34" charset="-122"/>
+                <a:cs typeface="Poppins" pitchFamily="34" charset="-120"/>
+              </a:rPr>
+              <a:t>Ref 2: Zhang et al., The Unreasonable Effectiveness of Deep Features as a Perceptual Metric (LPIPS), CVPR 2018</a:t>
+            </a:r>
+            <a:endParaRPr lang="en-US" sz="1200" dirty="0"/>
+          </a:p>
+        </p:txBody>
+      </p:sp>
+      <p:sp>
+        <p:nvSpPr>
+          <p:cNvPr id="29" name="Text 22"/>
+          <p:cNvSpPr txBox="1"/>
+          <p:nvPr/>
+        </p:nvSpPr>
+        <p:spPr>
+          <a:xfrm>
+            <a:off x="1792224" y="5742432"/>
+            <a:ext cx="9235440" cy="365760"/>
+          </a:xfrm>
+          <a:prstGeom prst="rect">
+            <a:avLst/>
+          </a:prstGeom>
+          <a:noFill/>
+          <a:ln/>
+        </p:spPr>
+        <p:txBody>
+          <a:bodyPr wrap="square" lIns="0" tIns="0" rIns="0" bIns="0" rtlCol="0" anchor="t"/>
+          <a:lstStyle/>
+          <a:p>
+            <a:pPr marL="0" indent="0" algn="l">
+              <a:buNone/>
+            </a:pPr>
+            <a:r>
+              <a:rPr lang="en-US" sz="1000" dirty="0">
+                <a:solidFill>
+                  <a:srgbClr val="FFFFFF">
+                    <a:alpha val="80000"/>
+                  </a:srgbClr>
+                </a:solidFill>
+                <a:latin typeface="Poppins" pitchFamily="34" charset="0"/>
+                <a:ea typeface="Poppins" pitchFamily="34" charset="-122"/>
+                <a:cs typeface="Poppins" pitchFamily="34" charset="-120"/>
+              </a:rPr>
+              <a:t>Ref 3: Shi et al., Real-Time Single Image Super-Resolution Using an Efficient Sub-Pixel CNN, CVPR 2016</a:t>
+            </a:r>
+            <a:endParaRPr lang="en-US" sz="1200" dirty="0"/>
           </a:p>
         </p:txBody>
       </p:sp>
       <p:pic>
         <p:nvPicPr>
-          <p:cNvPr id="28" name="Picture 27">
+          <p:cNvPr id="30" name="Picture 29">
             <a:extLst>
               <a:ext uri="{FF2B5EF4-FFF2-40B4-BE49-F238E27FC236}">
-                <a16:creationId xmlns:a16="http://schemas.microsoft.com/office/drawing/2014/main" id="{DAC5205F-3589-4B54-7039-C1C70523478B}"/>
+                <a16:creationId xmlns:a16="http://schemas.microsoft.com/office/drawing/2014/main" xmlns="" id="{135E3709-F1C8-6E84-EA51-720EFCF71B26}"/>
               </a:ext>
             </a:extLst>
           </p:cNvPr>
@@ -12970,7 +12093,7 @@
           <p:nvPr/>
         </p:nvPicPr>
         <p:blipFill>
-          <a:blip r:embed="rId10"/>
+          <a:blip r:embed="rId8"/>
           <a:stretch>
             <a:fillRect/>
           </a:stretch>
@@ -12987,10 +12110,10 @@
       </p:pic>
       <p:sp>
         <p:nvSpPr>
-          <p:cNvPr id="30" name="Shape 1">
+          <p:cNvPr id="32" name="Shape 1">
             <a:extLst>
               <a:ext uri="{FF2B5EF4-FFF2-40B4-BE49-F238E27FC236}">
-                <a16:creationId xmlns:a16="http://schemas.microsoft.com/office/drawing/2014/main" id="{89A93441-4E5C-0FCA-6BDD-16AB2E1B711C}"/>
+                <a16:creationId xmlns:a16="http://schemas.microsoft.com/office/drawing/2014/main" xmlns="" id="{3E27E131-AC1D-E75C-0267-02565ACC1BC3}"/>
               </a:ext>
             </a:extLst>
           </p:cNvPr>
@@ -12999,7 +12122,7 @@
         </p:nvSpPr>
         <p:spPr>
           <a:xfrm>
-            <a:off x="571500" y="167944"/>
+            <a:off x="571500" y="259714"/>
             <a:ext cx="11048695" cy="857707"/>
           </a:xfrm>
           <a:prstGeom prst="roundRect">
@@ -13031,10 +12154,10 @@
       </p:sp>
       <p:pic>
         <p:nvPicPr>
-          <p:cNvPr id="31" name="Picture 30">
+          <p:cNvPr id="33" name="Picture 32">
             <a:extLst>
               <a:ext uri="{FF2B5EF4-FFF2-40B4-BE49-F238E27FC236}">
-                <a16:creationId xmlns:a16="http://schemas.microsoft.com/office/drawing/2014/main" id="{73E0C32B-9271-FA34-86BB-7D95EB5AB342}"/>
+                <a16:creationId xmlns:a16="http://schemas.microsoft.com/office/drawing/2014/main" xmlns="" id="{1D876DBE-D402-1B41-B952-69F6F5BF98C9}"/>
               </a:ext>
             </a:extLst>
           </p:cNvPr>
@@ -13044,7 +12167,7 @@
           <p:nvPr/>
         </p:nvPicPr>
         <p:blipFill>
-          <a:blip r:embed="rId11">
+          <a:blip r:embed="rId9">
             <a:extLst>
               <a:ext uri="{28A0092B-C50C-407E-A947-70E740481C1C}">
                 <a14:useLocalDpi xmlns:a14="http://schemas.microsoft.com/office/drawing/2010/main" val="0"/>
@@ -13057,7 +12180,7 @@
         </p:blipFill>
         <p:spPr>
           <a:xfrm>
-            <a:off x="1514101" y="297181"/>
+            <a:off x="1514101" y="390016"/>
             <a:ext cx="9163491" cy="586435"/>
           </a:xfrm>
           <a:prstGeom prst="rect">

--- a/BYTE BRIGADE_PS01.pptx
+++ b/BYTE BRIGADE_PS01.pptx
@@ -11089,6 +11089,45 @@
           </a:prstGeom>
         </p:spPr>
       </p:pic>
+      <p:sp>
+        <p:nvSpPr>
+          <p:cNvPr id="20" name="Text 13"/>
+          <p:cNvSpPr txBox="1"/>
+          <p:nvPr/>
+        </p:nvSpPr>
+        <p:spPr>
+          <a:xfrm>
+            <a:off x="2866644" y="5243170"/>
+            <a:ext cx="5120640" cy="238658"/>
+          </a:xfrm>
+          <a:prstGeom prst="rect">
+            <a:avLst/>
+          </a:prstGeom>
+          <a:noFill/>
+          <a:ln/>
+        </p:spPr>
+        <p:txBody>
+          <a:bodyPr wrap="square" lIns="0" tIns="0" rIns="0" bIns="0" rtlCol="0" anchor="ctr"/>
+          <a:lstStyle/>
+          <a:p>
+            <a:pPr marL="0" indent="0" algn="l">
+              <a:buNone/>
+            </a:pPr>
+            <a:r>
+              <a:rPr lang="en-US" sz="1300" i="1" dirty="0">
+                <a:solidFill>
+                  <a:srgbClr val="D1D5DB"/>
+                </a:solidFill>
+                <a:latin typeface="Poppins" pitchFamily="34" charset="0"/>
+                <a:ea typeface="Poppins" pitchFamily="34" charset="-122"/>
+                <a:cs typeface="Poppins" pitchFamily="34" charset="-120"/>
+              </a:rPr>
+              <a:t>https://youtu.be/0eGuJqKfNBQ</a:t>
+            </a:r>
+            <a:endParaRPr lang="en-US" sz="1300" dirty="0"/>
+          </a:p>
+        </p:txBody>
+      </p:sp>
     </p:spTree>
   </p:cSld>
   <p:clrMapOvr>
